--- a/cpu/docs/presentations/output/PIC_Bunea_Cosmin-Andrei_v2.pptx
+++ b/cpu/docs/presentations/output/PIC_Bunea_Cosmin-Andrei_v2.pptx
@@ -2,20 +2,20 @@
 <file path=ppt/presentation.xml><?xml version="1.0" encoding="utf-8"?>
 <p:presentation xmlns:p="http://schemas.openxmlformats.org/presentationml/2006/main">
   <p:sldMasterIdLst>
-    <p:sldMasterId xmlns:r="http://schemas.openxmlformats.org/officeDocument/2006/relationships" id="2147483648" r:id="R525060b27a964379"/>
+    <p:sldMasterId xmlns:r="http://schemas.openxmlformats.org/officeDocument/2006/relationships" id="2147483648" r:id="R2ffb248c98ef40cc"/>
   </p:sldMasterIdLst>
   <p:notesMasterIdLst>
-    <p:notesMasterId xmlns:r="http://schemas.openxmlformats.org/officeDocument/2006/relationships" r:id="R9abe9b31cd894398"/>
+    <p:notesMasterId xmlns:r="http://schemas.openxmlformats.org/officeDocument/2006/relationships" r:id="R598d377a44b74401"/>
   </p:notesMasterIdLst>
   <p:sldIdLst>
-    <p:sldId xmlns:r="http://schemas.openxmlformats.org/officeDocument/2006/relationships" id="256" r:id="R052b45bf4d694f3c"/>
-    <p:sldId xmlns:r="http://schemas.openxmlformats.org/officeDocument/2006/relationships" id="257" r:id="R92799a93d2504e51"/>
-    <p:sldId xmlns:r="http://schemas.openxmlformats.org/officeDocument/2006/relationships" id="258" r:id="R828d14db293d4c9d"/>
-    <p:sldId xmlns:r="http://schemas.openxmlformats.org/officeDocument/2006/relationships" id="259" r:id="R9ed133a6037446de"/>
-    <p:sldId xmlns:r="http://schemas.openxmlformats.org/officeDocument/2006/relationships" id="260" r:id="R60e765a5d33a4239"/>
-    <p:sldId xmlns:r="http://schemas.openxmlformats.org/officeDocument/2006/relationships" id="261" r:id="R41fb708e671b400b"/>
-    <p:sldId xmlns:r="http://schemas.openxmlformats.org/officeDocument/2006/relationships" id="262" r:id="R8318b1c915914773"/>
-    <p:sldId xmlns:r="http://schemas.openxmlformats.org/officeDocument/2006/relationships" id="263" r:id="R21405051fa55426e"/>
+    <p:sldId xmlns:r="http://schemas.openxmlformats.org/officeDocument/2006/relationships" id="256" r:id="Rb5b5f9bbddb5427b"/>
+    <p:sldId xmlns:r="http://schemas.openxmlformats.org/officeDocument/2006/relationships" id="257" r:id="Re51fb41ba47a4f3d"/>
+    <p:sldId xmlns:r="http://schemas.openxmlformats.org/officeDocument/2006/relationships" id="258" r:id="R8d627f0353c6495c"/>
+    <p:sldId xmlns:r="http://schemas.openxmlformats.org/officeDocument/2006/relationships" id="259" r:id="Rb29c645e86df493b"/>
+    <p:sldId xmlns:r="http://schemas.openxmlformats.org/officeDocument/2006/relationships" id="260" r:id="Ra18ff4178810472f"/>
+    <p:sldId xmlns:r="http://schemas.openxmlformats.org/officeDocument/2006/relationships" id="261" r:id="R238b75428cd842c9"/>
+    <p:sldId xmlns:r="http://schemas.openxmlformats.org/officeDocument/2006/relationships" id="262" r:id="R80d7dff63d394065"/>
+    <p:sldId xmlns:r="http://schemas.openxmlformats.org/officeDocument/2006/relationships" id="263" r:id="R75e09d603ddf4c55"/>
   </p:sldIdLst>
   <p:sldSz cx="18288000" cy="10287000"/>
   <p:notesSz cx="6858000" cy="9144000"/>
@@ -848,7 +848,7 @@
           <a:lstStyle xmlns:a="http://schemas.openxmlformats.org/drawingml/2006/main"/>
           <a:p xmlns:a="http://schemas.openxmlformats.org/drawingml/2006/main">
             <a:r>
-              <a:t>1:30. The Python model computes the expected winner and pending set for all 24 orders of band urgency, with enable masks, CPU masks and ties. Directed tests cover the timing cases the model cannot: a new edge in the claim cycle, a masked source next to lower-priority ones, a key written with partial strobes, nesting, deadlines and reset. The AXI4-Lite front-end is compared with the PULP axi_lite_regs module on 96 strobe, order and stall cases. The three PIC cases of the mutation suite are all rejected.</a:t>
+              <a:t>1:30. The Python model computes the expected winner and pending set for all 24 orders of band urgency, with enable masks, CPU masks and ties. Directed tests cover the timing cases the model cannot: a new edge in the claim cycle, a masked source next to lower-priority ones, a key written with partial strobes, nesting, deadlines and reset. The AXI4-Lite front-end is compared with the PULP axi_lite_regs module on 96 strobe, order and stall cases. The four PIC cases of the mutation suite are all rejected.</a:t>
             </a:r>
           </a:p>
         </p:txBody>
@@ -1056,7 +1056,7 @@
   </p:cSld>
   <p:clrMap bg1="lt1" tx1="dk1" bg2="lt2" tx2="dk2" accent1="accent1" accent2="accent2" accent3="accent3" accent4="accent4" accent5="accent5" accent6="accent6" hlink="hlink" folHlink="folHlink"/>
   <p:sldLayoutIdLst>
-    <p:sldLayoutId xmlns:r="http://schemas.openxmlformats.org/officeDocument/2006/relationships" id="2147483649" r:id="Re187ac34ba384a14"/>
+    <p:sldLayoutId xmlns:r="http://schemas.openxmlformats.org/officeDocument/2006/relationships" id="2147483649" r:id="R0ef0493671ea42fb"/>
   </p:sldLayoutIdLst>
   <p:txStyles>
     <p:titleStyle>
@@ -1355,7 +1355,7 @@
           <p:cNvPr id="1" name="">
             <a:extLst xmlns:a="http://schemas.openxmlformats.org/drawingml/2006/main">
               <a:ext uri="{FF2B5EF4-FFF2-40B4-BE49-F238E27FC236}">
-                <a16:creationId xmlns:a16="http://schemas.microsoft.com/office/drawing/2014/main" id="{EFD996AC-0BC9-45F6-838E-A0365B36E603}"/>
+                <a16:creationId xmlns:a16="http://schemas.microsoft.com/office/drawing/2014/main" id="{2DA4D000-A600-4213-A538-3CD6A68DA555}"/>
               </a:ext>
             </a:extLst>
           </p:cNvPr>
@@ -1400,7 +1400,7 @@
           <p:cNvPr id="2" name="">
             <a:extLst xmlns:a="http://schemas.openxmlformats.org/drawingml/2006/main">
               <a:ext uri="{FF2B5EF4-FFF2-40B4-BE49-F238E27FC236}">
-                <a16:creationId xmlns:a16="http://schemas.microsoft.com/office/drawing/2014/main" id="{ACBBD86C-C26B-410A-AB7F-02A10790FDF5}"/>
+                <a16:creationId xmlns:a16="http://schemas.microsoft.com/office/drawing/2014/main" id="{48F0E061-162A-4EDE-B0A8-3D4FEF955965}"/>
               </a:ext>
             </a:extLst>
           </p:cNvPr>
@@ -1433,7 +1433,7 @@
           <p:cNvPr id="3" name="">
             <a:extLst xmlns:a="http://schemas.openxmlformats.org/drawingml/2006/main">
               <a:ext uri="{FF2B5EF4-FFF2-40B4-BE49-F238E27FC236}">
-                <a16:creationId xmlns:a16="http://schemas.microsoft.com/office/drawing/2014/main" id="{EC790369-2E2F-4A2D-9A0A-41237BA131B8}"/>
+                <a16:creationId xmlns:a16="http://schemas.microsoft.com/office/drawing/2014/main" id="{D1DF16EE-FA57-482C-90ED-49FB55992EB2}"/>
               </a:ext>
             </a:extLst>
           </p:cNvPr>
@@ -1478,7 +1478,7 @@
           <p:cNvPr id="4" name="">
             <a:extLst xmlns:a="http://schemas.openxmlformats.org/drawingml/2006/main">
               <a:ext uri="{FF2B5EF4-FFF2-40B4-BE49-F238E27FC236}">
-                <a16:creationId xmlns:a16="http://schemas.microsoft.com/office/drawing/2014/main" id="{85CF017E-DD20-4C3C-B396-83D424151A8A}"/>
+                <a16:creationId xmlns:a16="http://schemas.microsoft.com/office/drawing/2014/main" id="{73EF030B-EFEF-4ED8-8A7E-33824BCA4B54}"/>
               </a:ext>
             </a:extLst>
           </p:cNvPr>
@@ -1523,7 +1523,7 @@
           <p:cNvPr id="5" name="">
             <a:extLst xmlns:a="http://schemas.openxmlformats.org/drawingml/2006/main">
               <a:ext uri="{FF2B5EF4-FFF2-40B4-BE49-F238E27FC236}">
-                <a16:creationId xmlns:a16="http://schemas.microsoft.com/office/drawing/2014/main" id="{E6723F0C-9ACD-4FDC-8FC8-D450A001FB48}"/>
+                <a16:creationId xmlns:a16="http://schemas.microsoft.com/office/drawing/2014/main" id="{069622B1-643D-4B8C-854F-DA32B5E51025}"/>
               </a:ext>
             </a:extLst>
           </p:cNvPr>
@@ -1568,7 +1568,7 @@
           <p:cNvPr id="6" name="">
             <a:extLst xmlns:a="http://schemas.openxmlformats.org/drawingml/2006/main">
               <a:ext uri="{FF2B5EF4-FFF2-40B4-BE49-F238E27FC236}">
-                <a16:creationId xmlns:a16="http://schemas.microsoft.com/office/drawing/2014/main" id="{C0994692-772B-4E36-AF38-A7C271CACDC3}"/>
+                <a16:creationId xmlns:a16="http://schemas.microsoft.com/office/drawing/2014/main" id="{5AB0EA3A-D877-45D4-9A52-357FB61CA6F1}"/>
               </a:ext>
             </a:extLst>
           </p:cNvPr>
@@ -1647,7 +1647,7 @@
           <p:cNvPr id="7" name="">
             <a:extLst xmlns:a="http://schemas.openxmlformats.org/drawingml/2006/main">
               <a:ext uri="{FF2B5EF4-FFF2-40B4-BE49-F238E27FC236}">
-                <a16:creationId xmlns:a16="http://schemas.microsoft.com/office/drawing/2014/main" id="{CB3D506A-218C-4916-A100-5F990C208C7C}"/>
+                <a16:creationId xmlns:a16="http://schemas.microsoft.com/office/drawing/2014/main" id="{3AA82CA2-A0A2-47B7-9048-0784B3460C4A}"/>
               </a:ext>
             </a:extLst>
           </p:cNvPr>
@@ -1696,10 +1696,10 @@
           <p:nvPr/>
         </p:nvPicPr>
         <p:blipFill>
-          <a:blip xmlns:r="http://schemas.openxmlformats.org/officeDocument/2006/relationships" xmlns:a="http://schemas.openxmlformats.org/drawingml/2006/main" r:embed="Rf9a3cebcae6b415b">
+          <a:blip xmlns:r="http://schemas.openxmlformats.org/officeDocument/2006/relationships" xmlns:a="http://schemas.openxmlformats.org/drawingml/2006/main" r:embed="Rc6d43c8d901d480b">
             <a:extLst>
               <a:ext uri="{96DAC541-7B7A-43D3-8B79-37D633B846F1}">
-                <asvg:svgBlip xmlns:asvg="http://schemas.microsoft.com/office/drawing/2016/SVG/main" r:embed="R671a4116408c44e0"/>
+                <asvg:svgBlip xmlns:asvg="http://schemas.microsoft.com/office/drawing/2016/SVG/main" r:embed="R0aa41f0b35c14ef5"/>
               </a:ext>
             </a:extLst>
           </a:blip>
@@ -1718,7 +1718,7 @@
     </p:spTree>
     <p:extLst>
       <p:ext uri="{BB962C8B-B14F-4D97-AF65-F5344CB8AC3E}">
-        <p14:creationId xmlns:p14="http://schemas.microsoft.com/office/powerpoint/2010/main" val="1158521621"/>
+        <p14:creationId xmlns:p14="http://schemas.microsoft.com/office/powerpoint/2010/main" val="1608596745"/>
       </p:ext>
     </p:extLst>
   </p:cSld>
@@ -1742,7 +1742,7 @@
           <p:cNvPr id="1" name="slide-title">
             <a:extLst xmlns:a="http://schemas.openxmlformats.org/drawingml/2006/main">
               <a:ext uri="{FF2B5EF4-FFF2-40B4-BE49-F238E27FC236}">
-                <a16:creationId xmlns:a16="http://schemas.microsoft.com/office/drawing/2014/main" id="{4888F73B-3B68-4512-8DDF-B7056C87A68C}"/>
+                <a16:creationId xmlns:a16="http://schemas.microsoft.com/office/drawing/2014/main" id="{6413E5FD-D866-4E05-AA81-0903BE056084}"/>
               </a:ext>
             </a:extLst>
           </p:cNvPr>
@@ -1787,7 +1787,7 @@
           <p:cNvPr id="2" name="">
             <a:extLst xmlns:a="http://schemas.openxmlformats.org/drawingml/2006/main">
               <a:ext uri="{FF2B5EF4-FFF2-40B4-BE49-F238E27FC236}">
-                <a16:creationId xmlns:a16="http://schemas.microsoft.com/office/drawing/2014/main" id="{3F9CD0D6-288E-47FB-9FEF-9CEB321994F0}"/>
+                <a16:creationId xmlns:a16="http://schemas.microsoft.com/office/drawing/2014/main" id="{34CFF4A2-BB63-4396-BC00-C49D11699899}"/>
               </a:ext>
             </a:extLst>
           </p:cNvPr>
@@ -1820,7 +1820,7 @@
           <p:cNvPr id="3" name="">
             <a:extLst xmlns:a="http://schemas.openxmlformats.org/drawingml/2006/main">
               <a:ext uri="{FF2B5EF4-FFF2-40B4-BE49-F238E27FC236}">
-                <a16:creationId xmlns:a16="http://schemas.microsoft.com/office/drawing/2014/main" id="{C3B0E3FC-C48F-41DD-965E-296367ECC007}"/>
+                <a16:creationId xmlns:a16="http://schemas.microsoft.com/office/drawing/2014/main" id="{B52542C2-5A37-4BB9-BF48-323388B733D2}"/>
               </a:ext>
             </a:extLst>
           </p:cNvPr>
@@ -1849,7 +1849,7 @@
           <p:cNvPr id="4" name="">
             <a:extLst xmlns:a="http://schemas.openxmlformats.org/drawingml/2006/main">
               <a:ext uri="{FF2B5EF4-FFF2-40B4-BE49-F238E27FC236}">
-                <a16:creationId xmlns:a16="http://schemas.microsoft.com/office/drawing/2014/main" id="{27DCCBD7-D6A3-47DA-8925-CEE9A6ABF6AC}"/>
+                <a16:creationId xmlns:a16="http://schemas.microsoft.com/office/drawing/2014/main" id="{D70DD705-7A71-4B76-91AE-743559576934}"/>
               </a:ext>
             </a:extLst>
           </p:cNvPr>
@@ -1894,7 +1894,7 @@
           <p:cNvPr id="5" name="">
             <a:extLst xmlns:a="http://schemas.openxmlformats.org/drawingml/2006/main">
               <a:ext uri="{FF2B5EF4-FFF2-40B4-BE49-F238E27FC236}">
-                <a16:creationId xmlns:a16="http://schemas.microsoft.com/office/drawing/2014/main" id="{4805935D-1431-4FC7-8321-36E5FC9E3A02}"/>
+                <a16:creationId xmlns:a16="http://schemas.microsoft.com/office/drawing/2014/main" id="{8D60C642-74C8-4DCD-9849-6E160D1CB007}"/>
               </a:ext>
             </a:extLst>
           </p:cNvPr>
@@ -1939,7 +1939,7 @@
           <p:cNvPr id="6" name="">
             <a:extLst xmlns:a="http://schemas.openxmlformats.org/drawingml/2006/main">
               <a:ext uri="{FF2B5EF4-FFF2-40B4-BE49-F238E27FC236}">
-                <a16:creationId xmlns:a16="http://schemas.microsoft.com/office/drawing/2014/main" id="{42F058A8-441B-4448-B479-FBB0C6E5C870}"/>
+                <a16:creationId xmlns:a16="http://schemas.microsoft.com/office/drawing/2014/main" id="{26723992-0A84-4FA8-A703-DD52EF5B3531}"/>
               </a:ext>
             </a:extLst>
           </p:cNvPr>
@@ -1968,7 +1968,7 @@
           <p:cNvPr id="7" name="">
             <a:extLst xmlns:a="http://schemas.openxmlformats.org/drawingml/2006/main">
               <a:ext uri="{FF2B5EF4-FFF2-40B4-BE49-F238E27FC236}">
-                <a16:creationId xmlns:a16="http://schemas.microsoft.com/office/drawing/2014/main" id="{B07A1748-70A3-446D-A620-7298F86E0A4A}"/>
+                <a16:creationId xmlns:a16="http://schemas.microsoft.com/office/drawing/2014/main" id="{A40F0F4D-75EC-4B73-A7BD-0EAA7711E06E}"/>
               </a:ext>
             </a:extLst>
           </p:cNvPr>
@@ -2013,7 +2013,7 @@
           <p:cNvPr id="8" name="">
             <a:extLst xmlns:a="http://schemas.openxmlformats.org/drawingml/2006/main">
               <a:ext uri="{FF2B5EF4-FFF2-40B4-BE49-F238E27FC236}">
-                <a16:creationId xmlns:a16="http://schemas.microsoft.com/office/drawing/2014/main" id="{BEAE22D0-B810-44F2-9E6B-C69DE9F5B9A0}"/>
+                <a16:creationId xmlns:a16="http://schemas.microsoft.com/office/drawing/2014/main" id="{19BF2118-4256-45AC-B1A2-5EC29FD9FC4F}"/>
               </a:ext>
             </a:extLst>
           </p:cNvPr>
@@ -2058,7 +2058,7 @@
           <p:cNvPr id="9" name="">
             <a:extLst xmlns:a="http://schemas.openxmlformats.org/drawingml/2006/main">
               <a:ext uri="{FF2B5EF4-FFF2-40B4-BE49-F238E27FC236}">
-                <a16:creationId xmlns:a16="http://schemas.microsoft.com/office/drawing/2014/main" id="{3999EA57-D99B-4B03-A1B5-AE50C6C44C74}"/>
+                <a16:creationId xmlns:a16="http://schemas.microsoft.com/office/drawing/2014/main" id="{93CC60FD-65A0-47A5-B65D-654DD03647AB}"/>
               </a:ext>
             </a:extLst>
           </p:cNvPr>
@@ -2087,7 +2087,7 @@
           <p:cNvPr id="10" name="">
             <a:extLst xmlns:a="http://schemas.openxmlformats.org/drawingml/2006/main">
               <a:ext uri="{FF2B5EF4-FFF2-40B4-BE49-F238E27FC236}">
-                <a16:creationId xmlns:a16="http://schemas.microsoft.com/office/drawing/2014/main" id="{E2500385-C661-4211-A94F-37197BF38A85}"/>
+                <a16:creationId xmlns:a16="http://schemas.microsoft.com/office/drawing/2014/main" id="{9816B7C1-F1FD-4635-9D37-3F6008F8DA77}"/>
               </a:ext>
             </a:extLst>
           </p:cNvPr>
@@ -2132,7 +2132,7 @@
           <p:cNvPr id="11" name="">
             <a:extLst xmlns:a="http://schemas.openxmlformats.org/drawingml/2006/main">
               <a:ext uri="{FF2B5EF4-FFF2-40B4-BE49-F238E27FC236}">
-                <a16:creationId xmlns:a16="http://schemas.microsoft.com/office/drawing/2014/main" id="{A843D3BB-2D64-439E-9BD9-84C8FD63B324}"/>
+                <a16:creationId xmlns:a16="http://schemas.microsoft.com/office/drawing/2014/main" id="{E1FF6F09-3334-48C9-953E-5060AEA15E03}"/>
               </a:ext>
             </a:extLst>
           </p:cNvPr>
@@ -2177,7 +2177,7 @@
           <p:cNvPr id="12" name="">
             <a:extLst xmlns:a="http://schemas.openxmlformats.org/drawingml/2006/main">
               <a:ext uri="{FF2B5EF4-FFF2-40B4-BE49-F238E27FC236}">
-                <a16:creationId xmlns:a16="http://schemas.microsoft.com/office/drawing/2014/main" id="{B277D6D0-DEA3-4C7F-BA36-57483897D679}"/>
+                <a16:creationId xmlns:a16="http://schemas.microsoft.com/office/drawing/2014/main" id="{450937B4-06D2-428A-B78F-EA7EECFFEB0C}"/>
               </a:ext>
             </a:extLst>
           </p:cNvPr>
@@ -2206,7 +2206,7 @@
           <p:cNvPr id="13" name="">
             <a:extLst xmlns:a="http://schemas.openxmlformats.org/drawingml/2006/main">
               <a:ext uri="{FF2B5EF4-FFF2-40B4-BE49-F238E27FC236}">
-                <a16:creationId xmlns:a16="http://schemas.microsoft.com/office/drawing/2014/main" id="{54E06EDB-3D21-4FA3-A688-E3932F77F284}"/>
+                <a16:creationId xmlns:a16="http://schemas.microsoft.com/office/drawing/2014/main" id="{B65E0D05-1649-4D7B-9F55-364DBC28F381}"/>
               </a:ext>
             </a:extLst>
           </p:cNvPr>
@@ -2251,7 +2251,7 @@
           <p:cNvPr id="14" name="">
             <a:extLst xmlns:a="http://schemas.openxmlformats.org/drawingml/2006/main">
               <a:ext uri="{FF2B5EF4-FFF2-40B4-BE49-F238E27FC236}">
-                <a16:creationId xmlns:a16="http://schemas.microsoft.com/office/drawing/2014/main" id="{A24F7F73-E8FA-415F-9360-FBF87FE4F2D2}"/>
+                <a16:creationId xmlns:a16="http://schemas.microsoft.com/office/drawing/2014/main" id="{1EA85DE0-FCEA-4985-AF9A-D64E9C7210CE}"/>
               </a:ext>
             </a:extLst>
           </p:cNvPr>
@@ -2296,7 +2296,7 @@
           <p:cNvPr id="15" name="">
             <a:extLst xmlns:a="http://schemas.openxmlformats.org/drawingml/2006/main">
               <a:ext uri="{FF2B5EF4-FFF2-40B4-BE49-F238E27FC236}">
-                <a16:creationId xmlns:a16="http://schemas.microsoft.com/office/drawing/2014/main" id="{90D88F11-262C-47A9-A7BF-638AE4861D2F}"/>
+                <a16:creationId xmlns:a16="http://schemas.microsoft.com/office/drawing/2014/main" id="{173DA5C5-AF19-47D4-A755-6F569932C19D}"/>
               </a:ext>
             </a:extLst>
           </p:cNvPr>
@@ -2325,7 +2325,7 @@
           <p:cNvPr id="16" name="">
             <a:extLst xmlns:a="http://schemas.openxmlformats.org/drawingml/2006/main">
               <a:ext uri="{FF2B5EF4-FFF2-40B4-BE49-F238E27FC236}">
-                <a16:creationId xmlns:a16="http://schemas.microsoft.com/office/drawing/2014/main" id="{656EDF37-2F63-4482-B14C-DC093B93C7B7}"/>
+                <a16:creationId xmlns:a16="http://schemas.microsoft.com/office/drawing/2014/main" id="{BFE34644-08A9-4122-A22B-A74C3EF99E98}"/>
               </a:ext>
             </a:extLst>
           </p:cNvPr>
@@ -2370,7 +2370,7 @@
           <p:cNvPr id="17" name="">
             <a:extLst xmlns:a="http://schemas.openxmlformats.org/drawingml/2006/main">
               <a:ext uri="{FF2B5EF4-FFF2-40B4-BE49-F238E27FC236}">
-                <a16:creationId xmlns:a16="http://schemas.microsoft.com/office/drawing/2014/main" id="{8E65E60C-A42A-4C2E-89B0-39D5997E9FFB}"/>
+                <a16:creationId xmlns:a16="http://schemas.microsoft.com/office/drawing/2014/main" id="{5B894D86-E22D-45E3-8A1E-B00FFA4850B8}"/>
               </a:ext>
             </a:extLst>
           </p:cNvPr>
@@ -2415,7 +2415,7 @@
           <p:cNvPr id="18" name="">
             <a:extLst xmlns:a="http://schemas.openxmlformats.org/drawingml/2006/main">
               <a:ext uri="{FF2B5EF4-FFF2-40B4-BE49-F238E27FC236}">
-                <a16:creationId xmlns:a16="http://schemas.microsoft.com/office/drawing/2014/main" id="{4A1A0A07-674A-4D89-99B9-3AD567340F30}"/>
+                <a16:creationId xmlns:a16="http://schemas.microsoft.com/office/drawing/2014/main" id="{67DA0463-EF96-4D7E-A9CB-504AC9AED155}"/>
               </a:ext>
             </a:extLst>
           </p:cNvPr>
@@ -2444,7 +2444,7 @@
           <p:cNvPr id="19" name="">
             <a:extLst xmlns:a="http://schemas.openxmlformats.org/drawingml/2006/main">
               <a:ext uri="{FF2B5EF4-FFF2-40B4-BE49-F238E27FC236}">
-                <a16:creationId xmlns:a16="http://schemas.microsoft.com/office/drawing/2014/main" id="{D341AA86-6301-44C1-A525-876F1167999C}"/>
+                <a16:creationId xmlns:a16="http://schemas.microsoft.com/office/drawing/2014/main" id="{AA066737-50DE-4D91-9427-1354DB20D84B}"/>
               </a:ext>
             </a:extLst>
           </p:cNvPr>
@@ -2489,7 +2489,7 @@
           <p:cNvPr id="20" name="">
             <a:extLst xmlns:a="http://schemas.openxmlformats.org/drawingml/2006/main">
               <a:ext uri="{FF2B5EF4-FFF2-40B4-BE49-F238E27FC236}">
-                <a16:creationId xmlns:a16="http://schemas.microsoft.com/office/drawing/2014/main" id="{35C7E735-9859-4E3A-A390-9E7683F95193}"/>
+                <a16:creationId xmlns:a16="http://schemas.microsoft.com/office/drawing/2014/main" id="{005E6BE6-6E15-4047-ABCF-C871930C20DE}"/>
               </a:ext>
             </a:extLst>
           </p:cNvPr>
@@ -2534,7 +2534,7 @@
           <p:cNvPr id="21" name="">
             <a:extLst xmlns:a="http://schemas.openxmlformats.org/drawingml/2006/main">
               <a:ext uri="{FF2B5EF4-FFF2-40B4-BE49-F238E27FC236}">
-                <a16:creationId xmlns:a16="http://schemas.microsoft.com/office/drawing/2014/main" id="{8C8742DB-BD85-4B61-B6A2-CF2862B77195}"/>
+                <a16:creationId xmlns:a16="http://schemas.microsoft.com/office/drawing/2014/main" id="{BDB24893-1BB1-4865-AB92-4C0EAA5C250F}"/>
               </a:ext>
             </a:extLst>
           </p:cNvPr>
@@ -2563,7 +2563,7 @@
           <p:cNvPr id="22" name="">
             <a:extLst xmlns:a="http://schemas.openxmlformats.org/drawingml/2006/main">
               <a:ext uri="{FF2B5EF4-FFF2-40B4-BE49-F238E27FC236}">
-                <a16:creationId xmlns:a16="http://schemas.microsoft.com/office/drawing/2014/main" id="{0EB852D6-E463-4F1E-87C4-7C41FA245D1E}"/>
+                <a16:creationId xmlns:a16="http://schemas.microsoft.com/office/drawing/2014/main" id="{437C120D-5E18-4173-A384-343536F98A04}"/>
               </a:ext>
             </a:extLst>
           </p:cNvPr>
@@ -2608,7 +2608,7 @@
           <p:cNvPr id="23" name="">
             <a:extLst xmlns:a="http://schemas.openxmlformats.org/drawingml/2006/main">
               <a:ext uri="{FF2B5EF4-FFF2-40B4-BE49-F238E27FC236}">
-                <a16:creationId xmlns:a16="http://schemas.microsoft.com/office/drawing/2014/main" id="{748D9FF3-F215-4D04-A141-4E556E20395C}"/>
+                <a16:creationId xmlns:a16="http://schemas.microsoft.com/office/drawing/2014/main" id="{5913888A-018C-4C01-B08F-56A57F0199E3}"/>
               </a:ext>
             </a:extLst>
           </p:cNvPr>
@@ -2653,7 +2653,7 @@
           <p:cNvPr id="24" name="">
             <a:extLst xmlns:a="http://schemas.openxmlformats.org/drawingml/2006/main">
               <a:ext uri="{FF2B5EF4-FFF2-40B4-BE49-F238E27FC236}">
-                <a16:creationId xmlns:a16="http://schemas.microsoft.com/office/drawing/2014/main" id="{A1CECCF9-53B4-41ED-9568-901F6CD920FE}"/>
+                <a16:creationId xmlns:a16="http://schemas.microsoft.com/office/drawing/2014/main" id="{D83BF73B-CF4D-494D-85FA-567A7A077EBE}"/>
               </a:ext>
             </a:extLst>
           </p:cNvPr>
@@ -2682,7 +2682,7 @@
           <p:cNvPr id="25" name="">
             <a:extLst xmlns:a="http://schemas.openxmlformats.org/drawingml/2006/main">
               <a:ext uri="{FF2B5EF4-FFF2-40B4-BE49-F238E27FC236}">
-                <a16:creationId xmlns:a16="http://schemas.microsoft.com/office/drawing/2014/main" id="{01282D6E-BBC6-4FA9-9AA0-7608AA1438CF}"/>
+                <a16:creationId xmlns:a16="http://schemas.microsoft.com/office/drawing/2014/main" id="{877BF847-90F7-4F72-9D06-E9916B5B6B87}"/>
               </a:ext>
             </a:extLst>
           </p:cNvPr>
@@ -2727,7 +2727,7 @@
           <p:cNvPr id="26" name="">
             <a:extLst xmlns:a="http://schemas.openxmlformats.org/drawingml/2006/main">
               <a:ext uri="{FF2B5EF4-FFF2-40B4-BE49-F238E27FC236}">
-                <a16:creationId xmlns:a16="http://schemas.microsoft.com/office/drawing/2014/main" id="{D82D1BC8-AF60-4E3E-A654-F3E2B4234FF6}"/>
+                <a16:creationId xmlns:a16="http://schemas.microsoft.com/office/drawing/2014/main" id="{40E944FF-5B9F-4462-B502-C1FF2CD107CF}"/>
               </a:ext>
             </a:extLst>
           </p:cNvPr>
@@ -2772,7 +2772,7 @@
           <p:cNvPr id="27" name="">
             <a:extLst xmlns:a="http://schemas.openxmlformats.org/drawingml/2006/main">
               <a:ext uri="{FF2B5EF4-FFF2-40B4-BE49-F238E27FC236}">
-                <a16:creationId xmlns:a16="http://schemas.microsoft.com/office/drawing/2014/main" id="{C9D5F11E-110E-4474-88D5-0DDD0E73640C}"/>
+                <a16:creationId xmlns:a16="http://schemas.microsoft.com/office/drawing/2014/main" id="{3665F53D-947A-46DA-A713-7415A82D1B8C}"/>
               </a:ext>
             </a:extLst>
           </p:cNvPr>
@@ -2801,7 +2801,7 @@
           <p:cNvPr id="28" name="">
             <a:extLst xmlns:a="http://schemas.openxmlformats.org/drawingml/2006/main">
               <a:ext uri="{FF2B5EF4-FFF2-40B4-BE49-F238E27FC236}">
-                <a16:creationId xmlns:a16="http://schemas.microsoft.com/office/drawing/2014/main" id="{69EF78CC-8B46-4F2B-BB21-F1ADD16BFAB3}"/>
+                <a16:creationId xmlns:a16="http://schemas.microsoft.com/office/drawing/2014/main" id="{850AC3AC-0BF2-4FDB-AC41-C5B2879E1D1E}"/>
               </a:ext>
             </a:extLst>
           </p:cNvPr>
@@ -2846,7 +2846,7 @@
           <p:cNvPr id="29" name="">
             <a:extLst xmlns:a="http://schemas.openxmlformats.org/drawingml/2006/main">
               <a:ext uri="{FF2B5EF4-FFF2-40B4-BE49-F238E27FC236}">
-                <a16:creationId xmlns:a16="http://schemas.microsoft.com/office/drawing/2014/main" id="{A7921117-D18E-4A55-B18E-93E0B0A6DA53}"/>
+                <a16:creationId xmlns:a16="http://schemas.microsoft.com/office/drawing/2014/main" id="{CBEF1096-2F36-46BC-904E-F55500959855}"/>
               </a:ext>
             </a:extLst>
           </p:cNvPr>
@@ -2891,7 +2891,7 @@
           <p:cNvPr id="30" name="">
             <a:extLst xmlns:a="http://schemas.openxmlformats.org/drawingml/2006/main">
               <a:ext uri="{FF2B5EF4-FFF2-40B4-BE49-F238E27FC236}">
-                <a16:creationId xmlns:a16="http://schemas.microsoft.com/office/drawing/2014/main" id="{0849750E-BF55-4142-99E2-9F1618FFBBA5}"/>
+                <a16:creationId xmlns:a16="http://schemas.microsoft.com/office/drawing/2014/main" id="{B84E7C3D-AF61-4AC0-8B2B-6D959BECFE28}"/>
               </a:ext>
             </a:extLst>
           </p:cNvPr>
@@ -2920,7 +2920,7 @@
           <p:cNvPr id="31" name="">
             <a:extLst xmlns:a="http://schemas.openxmlformats.org/drawingml/2006/main">
               <a:ext uri="{FF2B5EF4-FFF2-40B4-BE49-F238E27FC236}">
-                <a16:creationId xmlns:a16="http://schemas.microsoft.com/office/drawing/2014/main" id="{8F5798B4-1245-4962-AD21-F988168A5FCA}"/>
+                <a16:creationId xmlns:a16="http://schemas.microsoft.com/office/drawing/2014/main" id="{FB8F0C5F-7BF8-4890-BE3D-B68EA9F7711E}"/>
               </a:ext>
             </a:extLst>
           </p:cNvPr>
@@ -2965,7 +2965,7 @@
           <p:cNvPr id="32" name="">
             <a:extLst xmlns:a="http://schemas.openxmlformats.org/drawingml/2006/main">
               <a:ext uri="{FF2B5EF4-FFF2-40B4-BE49-F238E27FC236}">
-                <a16:creationId xmlns:a16="http://schemas.microsoft.com/office/drawing/2014/main" id="{329A1FE4-051D-49FC-9A69-835064AB7A9C}"/>
+                <a16:creationId xmlns:a16="http://schemas.microsoft.com/office/drawing/2014/main" id="{C34DF46E-54BF-4FF7-BFB4-4534E71C0A66}"/>
               </a:ext>
             </a:extLst>
           </p:cNvPr>
@@ -3010,7 +3010,7 @@
           <p:cNvPr id="33" name="">
             <a:extLst xmlns:a="http://schemas.openxmlformats.org/drawingml/2006/main">
               <a:ext uri="{FF2B5EF4-FFF2-40B4-BE49-F238E27FC236}">
-                <a16:creationId xmlns:a16="http://schemas.microsoft.com/office/drawing/2014/main" id="{FC819BB2-B44D-4EC2-9B95-28110229CB56}"/>
+                <a16:creationId xmlns:a16="http://schemas.microsoft.com/office/drawing/2014/main" id="{2019D4E9-FE23-4803-BAA4-272BBAD82E2F}"/>
               </a:ext>
             </a:extLst>
           </p:cNvPr>
@@ -3055,7 +3055,7 @@
           <p:cNvPr id="34" name="footer">
             <a:extLst xmlns:a="http://schemas.openxmlformats.org/drawingml/2006/main">
               <a:ext uri="{FF2B5EF4-FFF2-40B4-BE49-F238E27FC236}">
-                <a16:creationId xmlns:a16="http://schemas.microsoft.com/office/drawing/2014/main" id="{FD831275-A7CC-41B6-82DC-6EBF5F1B3FD2}"/>
+                <a16:creationId xmlns:a16="http://schemas.microsoft.com/office/drawing/2014/main" id="{62A49D1A-96CE-41FD-9D48-A3FF667A7668}"/>
               </a:ext>
             </a:extLst>
           </p:cNvPr>
@@ -3098,7 +3098,7 @@
     </p:spTree>
     <p:extLst>
       <p:ext uri="{BB962C8B-B14F-4D97-AF65-F5344CB8AC3E}">
-        <p14:creationId xmlns:p14="http://schemas.microsoft.com/office/powerpoint/2010/main" val="721879517"/>
+        <p14:creationId xmlns:p14="http://schemas.microsoft.com/office/powerpoint/2010/main" val="708755127"/>
       </p:ext>
     </p:extLst>
   </p:cSld>
@@ -3122,7 +3122,7 @@
           <p:cNvPr id="1" name="slide-title">
             <a:extLst xmlns:a="http://schemas.openxmlformats.org/drawingml/2006/main">
               <a:ext uri="{FF2B5EF4-FFF2-40B4-BE49-F238E27FC236}">
-                <a16:creationId xmlns:a16="http://schemas.microsoft.com/office/drawing/2014/main" id="{B7F04AC4-6EEB-44A1-A721-A6A086429325}"/>
+                <a16:creationId xmlns:a16="http://schemas.microsoft.com/office/drawing/2014/main" id="{925BE506-7B51-435A-9950-AE5A4ED81418}"/>
               </a:ext>
             </a:extLst>
           </p:cNvPr>
@@ -3167,7 +3167,7 @@
           <p:cNvPr id="2" name="">
             <a:extLst xmlns:a="http://schemas.openxmlformats.org/drawingml/2006/main">
               <a:ext uri="{FF2B5EF4-FFF2-40B4-BE49-F238E27FC236}">
-                <a16:creationId xmlns:a16="http://schemas.microsoft.com/office/drawing/2014/main" id="{CA988D04-5DAF-4CB6-B3F7-EF7624DBBF60}"/>
+                <a16:creationId xmlns:a16="http://schemas.microsoft.com/office/drawing/2014/main" id="{4B786556-5E36-4744-A89C-6F2F1E525EEE}"/>
               </a:ext>
             </a:extLst>
           </p:cNvPr>
@@ -3200,7 +3200,7 @@
           <p:cNvPr id="3" name="">
             <a:extLst xmlns:a="http://schemas.openxmlformats.org/drawingml/2006/main">
               <a:ext uri="{FF2B5EF4-FFF2-40B4-BE49-F238E27FC236}">
-                <a16:creationId xmlns:a16="http://schemas.microsoft.com/office/drawing/2014/main" id="{7E3399C6-B9E6-4999-B101-C54D669705C9}"/>
+                <a16:creationId xmlns:a16="http://schemas.microsoft.com/office/drawing/2014/main" id="{F93A5CF0-9174-457E-B313-E9737093ABBF}"/>
               </a:ext>
             </a:extLst>
           </p:cNvPr>
@@ -3245,7 +3245,7 @@
           <p:cNvPr id="4" name="">
             <a:extLst xmlns:a="http://schemas.openxmlformats.org/drawingml/2006/main">
               <a:ext uri="{FF2B5EF4-FFF2-40B4-BE49-F238E27FC236}">
-                <a16:creationId xmlns:a16="http://schemas.microsoft.com/office/drawing/2014/main" id="{47718681-61DF-4AC3-AC73-060777C551B4}"/>
+                <a16:creationId xmlns:a16="http://schemas.microsoft.com/office/drawing/2014/main" id="{E4793804-7AE5-4786-B9F9-7EBC49D0D5BF}"/>
               </a:ext>
             </a:extLst>
           </p:cNvPr>
@@ -3290,7 +3290,7 @@
           <p:cNvPr id="5" name="">
             <a:extLst xmlns:a="http://schemas.openxmlformats.org/drawingml/2006/main">
               <a:ext uri="{FF2B5EF4-FFF2-40B4-BE49-F238E27FC236}">
-                <a16:creationId xmlns:a16="http://schemas.microsoft.com/office/drawing/2014/main" id="{2C5D2821-8BBE-4724-A237-B0C2AEDE83FA}"/>
+                <a16:creationId xmlns:a16="http://schemas.microsoft.com/office/drawing/2014/main" id="{B7F8D489-7A81-4E56-84CD-D431274F6D32}"/>
               </a:ext>
             </a:extLst>
           </p:cNvPr>
@@ -3319,7 +3319,7 @@
           <p:cNvPr id="6" name="">
             <a:extLst xmlns:a="http://schemas.openxmlformats.org/drawingml/2006/main">
               <a:ext uri="{FF2B5EF4-FFF2-40B4-BE49-F238E27FC236}">
-                <a16:creationId xmlns:a16="http://schemas.microsoft.com/office/drawing/2014/main" id="{BEBBCFEF-400B-47AA-A585-F11DA2250947}"/>
+                <a16:creationId xmlns:a16="http://schemas.microsoft.com/office/drawing/2014/main" id="{38484920-E7E6-4702-8F71-3470B54C646D}"/>
               </a:ext>
             </a:extLst>
           </p:cNvPr>
@@ -3364,7 +3364,7 @@
           <p:cNvPr id="7" name="">
             <a:extLst xmlns:a="http://schemas.openxmlformats.org/drawingml/2006/main">
               <a:ext uri="{FF2B5EF4-FFF2-40B4-BE49-F238E27FC236}">
-                <a16:creationId xmlns:a16="http://schemas.microsoft.com/office/drawing/2014/main" id="{A2050A25-3B98-45F4-9268-4602D0CBB1A8}"/>
+                <a16:creationId xmlns:a16="http://schemas.microsoft.com/office/drawing/2014/main" id="{2762E8E9-2EE7-417B-96BC-2AF80BB48A81}"/>
               </a:ext>
             </a:extLst>
           </p:cNvPr>
@@ -3409,7 +3409,7 @@
           <p:cNvPr id="8" name="">
             <a:extLst xmlns:a="http://schemas.openxmlformats.org/drawingml/2006/main">
               <a:ext uri="{FF2B5EF4-FFF2-40B4-BE49-F238E27FC236}">
-                <a16:creationId xmlns:a16="http://schemas.microsoft.com/office/drawing/2014/main" id="{DA1282C5-7C1D-426B-A677-1ED267ACF389}"/>
+                <a16:creationId xmlns:a16="http://schemas.microsoft.com/office/drawing/2014/main" id="{243258F6-0C59-491E-BC0E-F1DE3195FD9B}"/>
               </a:ext>
             </a:extLst>
           </p:cNvPr>
@@ -3454,7 +3454,7 @@
           <p:cNvPr id="9" name="">
             <a:extLst xmlns:a="http://schemas.openxmlformats.org/drawingml/2006/main">
               <a:ext uri="{FF2B5EF4-FFF2-40B4-BE49-F238E27FC236}">
-                <a16:creationId xmlns:a16="http://schemas.microsoft.com/office/drawing/2014/main" id="{09405711-6E44-4622-BD10-AE8AACD9F9F2}"/>
+                <a16:creationId xmlns:a16="http://schemas.microsoft.com/office/drawing/2014/main" id="{200DB47F-AF33-4FD6-8162-D0E38C75986A}"/>
               </a:ext>
             </a:extLst>
           </p:cNvPr>
@@ -3499,7 +3499,7 @@
           <p:cNvPr id="10" name="">
             <a:extLst xmlns:a="http://schemas.openxmlformats.org/drawingml/2006/main">
               <a:ext uri="{FF2B5EF4-FFF2-40B4-BE49-F238E27FC236}">
-                <a16:creationId xmlns:a16="http://schemas.microsoft.com/office/drawing/2014/main" id="{32AC7BFF-742E-4B95-9526-52E5ABDC89C7}"/>
+                <a16:creationId xmlns:a16="http://schemas.microsoft.com/office/drawing/2014/main" id="{02C5CB56-0901-4A60-9C31-4ACBE9221EFF}"/>
               </a:ext>
             </a:extLst>
           </p:cNvPr>
@@ -3528,7 +3528,7 @@
           <p:cNvPr id="11" name="">
             <a:extLst xmlns:a="http://schemas.openxmlformats.org/drawingml/2006/main">
               <a:ext uri="{FF2B5EF4-FFF2-40B4-BE49-F238E27FC236}">
-                <a16:creationId xmlns:a16="http://schemas.microsoft.com/office/drawing/2014/main" id="{F87EA3A0-855B-4611-8333-0AAE195FE690}"/>
+                <a16:creationId xmlns:a16="http://schemas.microsoft.com/office/drawing/2014/main" id="{E2DE004A-C4D9-4F92-8B84-722001C1F772}"/>
               </a:ext>
             </a:extLst>
           </p:cNvPr>
@@ -3573,7 +3573,7 @@
           <p:cNvPr id="12" name="">
             <a:extLst xmlns:a="http://schemas.openxmlformats.org/drawingml/2006/main">
               <a:ext uri="{FF2B5EF4-FFF2-40B4-BE49-F238E27FC236}">
-                <a16:creationId xmlns:a16="http://schemas.microsoft.com/office/drawing/2014/main" id="{FD16FC81-BE9D-4E83-BB00-7FFE9DDE28C8}"/>
+                <a16:creationId xmlns:a16="http://schemas.microsoft.com/office/drawing/2014/main" id="{9AE1928D-A2C1-4061-B931-CE34FC0B8C6C}"/>
               </a:ext>
             </a:extLst>
           </p:cNvPr>
@@ -3618,7 +3618,7 @@
           <p:cNvPr id="13" name="">
             <a:extLst xmlns:a="http://schemas.openxmlformats.org/drawingml/2006/main">
               <a:ext uri="{FF2B5EF4-FFF2-40B4-BE49-F238E27FC236}">
-                <a16:creationId xmlns:a16="http://schemas.microsoft.com/office/drawing/2014/main" id="{06D7CCFB-20D7-4AA9-8421-6D1BA896094D}"/>
+                <a16:creationId xmlns:a16="http://schemas.microsoft.com/office/drawing/2014/main" id="{5D677CC6-8C10-4800-9364-C3F5A0D0DCD7}"/>
               </a:ext>
             </a:extLst>
           </p:cNvPr>
@@ -3663,7 +3663,7 @@
           <p:cNvPr id="14" name="">
             <a:extLst xmlns:a="http://schemas.openxmlformats.org/drawingml/2006/main">
               <a:ext uri="{FF2B5EF4-FFF2-40B4-BE49-F238E27FC236}">
-                <a16:creationId xmlns:a16="http://schemas.microsoft.com/office/drawing/2014/main" id="{B050AFC6-5598-40AF-97AC-14FAF74B9017}"/>
+                <a16:creationId xmlns:a16="http://schemas.microsoft.com/office/drawing/2014/main" id="{6236427E-F4A0-43B0-8693-73DDDB350ECD}"/>
               </a:ext>
             </a:extLst>
           </p:cNvPr>
@@ -3708,7 +3708,7 @@
           <p:cNvPr id="15" name="">
             <a:extLst xmlns:a="http://schemas.openxmlformats.org/drawingml/2006/main">
               <a:ext uri="{FF2B5EF4-FFF2-40B4-BE49-F238E27FC236}">
-                <a16:creationId xmlns:a16="http://schemas.microsoft.com/office/drawing/2014/main" id="{06E4D009-B009-45F1-91B5-2BD5579D6369}"/>
+                <a16:creationId xmlns:a16="http://schemas.microsoft.com/office/drawing/2014/main" id="{1E138082-5BE4-4E6B-8383-3AA594214660}"/>
               </a:ext>
             </a:extLst>
           </p:cNvPr>
@@ -3737,7 +3737,7 @@
           <p:cNvPr id="16" name="">
             <a:extLst xmlns:a="http://schemas.openxmlformats.org/drawingml/2006/main">
               <a:ext uri="{FF2B5EF4-FFF2-40B4-BE49-F238E27FC236}">
-                <a16:creationId xmlns:a16="http://schemas.microsoft.com/office/drawing/2014/main" id="{8D6EDD17-1149-4C5C-8B5C-D7842BD14EEF}"/>
+                <a16:creationId xmlns:a16="http://schemas.microsoft.com/office/drawing/2014/main" id="{A3E14CF6-9EC6-4EEB-B5A0-1E959D5D2F3F}"/>
               </a:ext>
             </a:extLst>
           </p:cNvPr>
@@ -3782,7 +3782,7 @@
           <p:cNvPr id="17" name="">
             <a:extLst xmlns:a="http://schemas.openxmlformats.org/drawingml/2006/main">
               <a:ext uri="{FF2B5EF4-FFF2-40B4-BE49-F238E27FC236}">
-                <a16:creationId xmlns:a16="http://schemas.microsoft.com/office/drawing/2014/main" id="{E7414EE4-B786-4152-9E74-07201380E84C}"/>
+                <a16:creationId xmlns:a16="http://schemas.microsoft.com/office/drawing/2014/main" id="{03B81246-C783-4BFC-859B-86364D0051E7}"/>
               </a:ext>
             </a:extLst>
           </p:cNvPr>
@@ -3827,7 +3827,7 @@
           <p:cNvPr id="18" name="">
             <a:extLst xmlns:a="http://schemas.openxmlformats.org/drawingml/2006/main">
               <a:ext uri="{FF2B5EF4-FFF2-40B4-BE49-F238E27FC236}">
-                <a16:creationId xmlns:a16="http://schemas.microsoft.com/office/drawing/2014/main" id="{7DC4AEB1-5B1A-403B-8D3D-572A1193C9D0}"/>
+                <a16:creationId xmlns:a16="http://schemas.microsoft.com/office/drawing/2014/main" id="{0320CDB9-ACC5-4352-B437-DCCF5A6ED24A}"/>
               </a:ext>
             </a:extLst>
           </p:cNvPr>
@@ -3872,7 +3872,7 @@
           <p:cNvPr id="19" name="">
             <a:extLst xmlns:a="http://schemas.openxmlformats.org/drawingml/2006/main">
               <a:ext uri="{FF2B5EF4-FFF2-40B4-BE49-F238E27FC236}">
-                <a16:creationId xmlns:a16="http://schemas.microsoft.com/office/drawing/2014/main" id="{3BEBC1AB-E589-4F43-84F8-303645EF6C5F}"/>
+                <a16:creationId xmlns:a16="http://schemas.microsoft.com/office/drawing/2014/main" id="{5BA549C5-364D-406A-B53D-48C16E8E0F5F}"/>
               </a:ext>
             </a:extLst>
           </p:cNvPr>
@@ -3917,7 +3917,7 @@
           <p:cNvPr id="20" name="">
             <a:extLst xmlns:a="http://schemas.openxmlformats.org/drawingml/2006/main">
               <a:ext uri="{FF2B5EF4-FFF2-40B4-BE49-F238E27FC236}">
-                <a16:creationId xmlns:a16="http://schemas.microsoft.com/office/drawing/2014/main" id="{592E98CC-4A13-405E-BE18-378E8167DCE4}"/>
+                <a16:creationId xmlns:a16="http://schemas.microsoft.com/office/drawing/2014/main" id="{4845EB6F-0C60-488F-AECE-44567E6A2BCE}"/>
               </a:ext>
             </a:extLst>
           </p:cNvPr>
@@ -3946,7 +3946,7 @@
           <p:cNvPr id="21" name="">
             <a:extLst xmlns:a="http://schemas.openxmlformats.org/drawingml/2006/main">
               <a:ext uri="{FF2B5EF4-FFF2-40B4-BE49-F238E27FC236}">
-                <a16:creationId xmlns:a16="http://schemas.microsoft.com/office/drawing/2014/main" id="{6C488E4E-7A9C-440C-A3CA-39167FE37819}"/>
+                <a16:creationId xmlns:a16="http://schemas.microsoft.com/office/drawing/2014/main" id="{B3E2DF14-A11A-42A0-8C4E-A8719AB8FD21}"/>
               </a:ext>
             </a:extLst>
           </p:cNvPr>
@@ -3991,7 +3991,7 @@
           <p:cNvPr id="22" name="">
             <a:extLst xmlns:a="http://schemas.openxmlformats.org/drawingml/2006/main">
               <a:ext uri="{FF2B5EF4-FFF2-40B4-BE49-F238E27FC236}">
-                <a16:creationId xmlns:a16="http://schemas.microsoft.com/office/drawing/2014/main" id="{7A885641-8BD1-4DC2-ABF3-4BB1B1C37D33}"/>
+                <a16:creationId xmlns:a16="http://schemas.microsoft.com/office/drawing/2014/main" id="{2121EB2D-7515-46EF-8216-EF25669570C3}"/>
               </a:ext>
             </a:extLst>
           </p:cNvPr>
@@ -4036,7 +4036,7 @@
           <p:cNvPr id="23" name="">
             <a:extLst xmlns:a="http://schemas.openxmlformats.org/drawingml/2006/main">
               <a:ext uri="{FF2B5EF4-FFF2-40B4-BE49-F238E27FC236}">
-                <a16:creationId xmlns:a16="http://schemas.microsoft.com/office/drawing/2014/main" id="{AFC290F5-232A-497A-A853-C48DEE51BAF4}"/>
+                <a16:creationId xmlns:a16="http://schemas.microsoft.com/office/drawing/2014/main" id="{85A1C749-148E-4FC4-BDE4-4C1BAB3BA6F8}"/>
               </a:ext>
             </a:extLst>
           </p:cNvPr>
@@ -4081,7 +4081,7 @@
           <p:cNvPr id="24" name="">
             <a:extLst xmlns:a="http://schemas.openxmlformats.org/drawingml/2006/main">
               <a:ext uri="{FF2B5EF4-FFF2-40B4-BE49-F238E27FC236}">
-                <a16:creationId xmlns:a16="http://schemas.microsoft.com/office/drawing/2014/main" id="{D9EBFA6C-A68B-4044-BB58-4D53C2390CD1}"/>
+                <a16:creationId xmlns:a16="http://schemas.microsoft.com/office/drawing/2014/main" id="{F63F78BF-0A76-4E5F-8717-296882D554DF}"/>
               </a:ext>
             </a:extLst>
           </p:cNvPr>
@@ -4126,7 +4126,7 @@
           <p:cNvPr id="25" name="">
             <a:extLst xmlns:a="http://schemas.openxmlformats.org/drawingml/2006/main">
               <a:ext uri="{FF2B5EF4-FFF2-40B4-BE49-F238E27FC236}">
-                <a16:creationId xmlns:a16="http://schemas.microsoft.com/office/drawing/2014/main" id="{010D8C80-AF1E-433A-81D0-AF16C8B4343E}"/>
+                <a16:creationId xmlns:a16="http://schemas.microsoft.com/office/drawing/2014/main" id="{8A4E3EA5-A5E6-4C18-9AFA-E13165EDF250}"/>
               </a:ext>
             </a:extLst>
           </p:cNvPr>
@@ -4155,7 +4155,7 @@
           <p:cNvPr id="26" name="">
             <a:extLst xmlns:a="http://schemas.openxmlformats.org/drawingml/2006/main">
               <a:ext uri="{FF2B5EF4-FFF2-40B4-BE49-F238E27FC236}">
-                <a16:creationId xmlns:a16="http://schemas.microsoft.com/office/drawing/2014/main" id="{984E1EDC-046A-4E5E-946C-715F712F6F94}"/>
+                <a16:creationId xmlns:a16="http://schemas.microsoft.com/office/drawing/2014/main" id="{E758E974-2D45-4DE5-B993-E5FA8B493503}"/>
               </a:ext>
             </a:extLst>
           </p:cNvPr>
@@ -4200,7 +4200,7 @@
           <p:cNvPr id="27" name="">
             <a:extLst xmlns:a="http://schemas.openxmlformats.org/drawingml/2006/main">
               <a:ext uri="{FF2B5EF4-FFF2-40B4-BE49-F238E27FC236}">
-                <a16:creationId xmlns:a16="http://schemas.microsoft.com/office/drawing/2014/main" id="{D5530283-7D77-409F-97BA-F7642EF36D56}"/>
+                <a16:creationId xmlns:a16="http://schemas.microsoft.com/office/drawing/2014/main" id="{28A44836-0717-48A0-9F90-C8DC78D331FC}"/>
               </a:ext>
             </a:extLst>
           </p:cNvPr>
@@ -4245,7 +4245,7 @@
           <p:cNvPr id="28" name="">
             <a:extLst xmlns:a="http://schemas.openxmlformats.org/drawingml/2006/main">
               <a:ext uri="{FF2B5EF4-FFF2-40B4-BE49-F238E27FC236}">
-                <a16:creationId xmlns:a16="http://schemas.microsoft.com/office/drawing/2014/main" id="{E9CA6D27-5A47-41EC-A602-AE77A1105788}"/>
+                <a16:creationId xmlns:a16="http://schemas.microsoft.com/office/drawing/2014/main" id="{85CF5127-1A4A-4CA1-B7A3-2D10BB1B50FE}"/>
               </a:ext>
             </a:extLst>
           </p:cNvPr>
@@ -4290,7 +4290,7 @@
           <p:cNvPr id="29" name="">
             <a:extLst xmlns:a="http://schemas.openxmlformats.org/drawingml/2006/main">
               <a:ext uri="{FF2B5EF4-FFF2-40B4-BE49-F238E27FC236}">
-                <a16:creationId xmlns:a16="http://schemas.microsoft.com/office/drawing/2014/main" id="{3CB552BA-D8A6-48C2-A2F7-D5A82B8E5053}"/>
+                <a16:creationId xmlns:a16="http://schemas.microsoft.com/office/drawing/2014/main" id="{F13A3FC9-A56F-4F30-A829-FAF0B8D14D90}"/>
               </a:ext>
             </a:extLst>
           </p:cNvPr>
@@ -4335,7 +4335,7 @@
           <p:cNvPr id="30" name="footer">
             <a:extLst xmlns:a="http://schemas.openxmlformats.org/drawingml/2006/main">
               <a:ext uri="{FF2B5EF4-FFF2-40B4-BE49-F238E27FC236}">
-                <a16:creationId xmlns:a16="http://schemas.microsoft.com/office/drawing/2014/main" id="{E8540032-504F-45E2-87A9-573CBFDE040B}"/>
+                <a16:creationId xmlns:a16="http://schemas.microsoft.com/office/drawing/2014/main" id="{67982A37-B6F9-4267-B47F-192339D2475E}"/>
               </a:ext>
             </a:extLst>
           </p:cNvPr>
@@ -4378,7 +4378,7 @@
     </p:spTree>
     <p:extLst>
       <p:ext uri="{BB962C8B-B14F-4D97-AF65-F5344CB8AC3E}">
-        <p14:creationId xmlns:p14="http://schemas.microsoft.com/office/powerpoint/2010/main" val="508341984"/>
+        <p14:creationId xmlns:p14="http://schemas.microsoft.com/office/powerpoint/2010/main" val="2021841689"/>
       </p:ext>
     </p:extLst>
   </p:cSld>
@@ -4402,7 +4402,7 @@
           <p:cNvPr id="1" name="slide-title">
             <a:extLst xmlns:a="http://schemas.openxmlformats.org/drawingml/2006/main">
               <a:ext uri="{FF2B5EF4-FFF2-40B4-BE49-F238E27FC236}">
-                <a16:creationId xmlns:a16="http://schemas.microsoft.com/office/drawing/2014/main" id="{05B16660-3B25-441A-835A-98880175079F}"/>
+                <a16:creationId xmlns:a16="http://schemas.microsoft.com/office/drawing/2014/main" id="{FFE32AAA-7DA0-404A-9FCF-711DF7505510}"/>
               </a:ext>
             </a:extLst>
           </p:cNvPr>
@@ -4451,10 +4451,10 @@
           <p:nvPr/>
         </p:nvPicPr>
         <p:blipFill>
-          <a:blip xmlns:r="http://schemas.openxmlformats.org/officeDocument/2006/relationships" xmlns:a="http://schemas.openxmlformats.org/drawingml/2006/main" r:embed="R72903080de644c72">
+          <a:blip xmlns:r="http://schemas.openxmlformats.org/officeDocument/2006/relationships" xmlns:a="http://schemas.openxmlformats.org/drawingml/2006/main" r:embed="R7969330215fb4d07">
             <a:extLst>
               <a:ext uri="{96DAC541-7B7A-43D3-8B79-37D633B846F1}">
-                <asvg:svgBlip xmlns:asvg="http://schemas.microsoft.com/office/drawing/2016/SVG/main" r:embed="Rc65f106cf4ce4fa4"/>
+                <asvg:svgBlip xmlns:asvg="http://schemas.microsoft.com/office/drawing/2016/SVG/main" r:embed="R847290691c6844a1"/>
               </a:ext>
             </a:extLst>
           </a:blip>
@@ -4473,7 +4473,7 @@
     </p:spTree>
     <p:extLst>
       <p:ext uri="{BB962C8B-B14F-4D97-AF65-F5344CB8AC3E}">
-        <p14:creationId xmlns:p14="http://schemas.microsoft.com/office/powerpoint/2010/main" val="1555533267"/>
+        <p14:creationId xmlns:p14="http://schemas.microsoft.com/office/powerpoint/2010/main" val="1458316807"/>
       </p:ext>
     </p:extLst>
   </p:cSld>
@@ -4497,7 +4497,7 @@
           <p:cNvPr id="1" name="slide-title">
             <a:extLst xmlns:a="http://schemas.openxmlformats.org/drawingml/2006/main">
               <a:ext uri="{FF2B5EF4-FFF2-40B4-BE49-F238E27FC236}">
-                <a16:creationId xmlns:a16="http://schemas.microsoft.com/office/drawing/2014/main" id="{5A23B633-F515-43DE-8193-4FE41A3F369C}"/>
+                <a16:creationId xmlns:a16="http://schemas.microsoft.com/office/drawing/2014/main" id="{1E688AF3-2FA2-4F30-A082-D801A6068A88}"/>
               </a:ext>
             </a:extLst>
           </p:cNvPr>
@@ -4542,7 +4542,7 @@
           <p:cNvPr id="2" name="">
             <a:extLst xmlns:a="http://schemas.openxmlformats.org/drawingml/2006/main">
               <a:ext uri="{FF2B5EF4-FFF2-40B4-BE49-F238E27FC236}">
-                <a16:creationId xmlns:a16="http://schemas.microsoft.com/office/drawing/2014/main" id="{11D6D112-479F-4E75-9AF1-532CDD30F85B}"/>
+                <a16:creationId xmlns:a16="http://schemas.microsoft.com/office/drawing/2014/main" id="{BB5F7D92-A9BF-40AC-B9B5-621317A43934}"/>
               </a:ext>
             </a:extLst>
           </p:cNvPr>
@@ -4575,7 +4575,7 @@
           <p:cNvPr id="3" name="">
             <a:extLst xmlns:a="http://schemas.openxmlformats.org/drawingml/2006/main">
               <a:ext uri="{FF2B5EF4-FFF2-40B4-BE49-F238E27FC236}">
-                <a16:creationId xmlns:a16="http://schemas.microsoft.com/office/drawing/2014/main" id="{A3CE3D1D-2C2E-4C61-9419-8E05FF0A4228}"/>
+                <a16:creationId xmlns:a16="http://schemas.microsoft.com/office/drawing/2014/main" id="{6C7351DF-AC73-4A22-BB34-7E0BDB50D46E}"/>
               </a:ext>
             </a:extLst>
           </p:cNvPr>
@@ -4620,7 +4620,7 @@
           <p:cNvPr id="4" name="">
             <a:extLst xmlns:a="http://schemas.openxmlformats.org/drawingml/2006/main">
               <a:ext uri="{FF2B5EF4-FFF2-40B4-BE49-F238E27FC236}">
-                <a16:creationId xmlns:a16="http://schemas.microsoft.com/office/drawing/2014/main" id="{41B3A3E5-2CD4-41ED-B68F-BB180AABD77B}"/>
+                <a16:creationId xmlns:a16="http://schemas.microsoft.com/office/drawing/2014/main" id="{6755044A-0AA5-400E-A51E-9DA3C261715B}"/>
               </a:ext>
             </a:extLst>
           </p:cNvPr>
@@ -4665,7 +4665,7 @@
           <p:cNvPr id="5" name="">
             <a:extLst xmlns:a="http://schemas.openxmlformats.org/drawingml/2006/main">
               <a:ext uri="{FF2B5EF4-FFF2-40B4-BE49-F238E27FC236}">
-                <a16:creationId xmlns:a16="http://schemas.microsoft.com/office/drawing/2014/main" id="{C1AA21B1-B7F0-42D9-8784-D66E1EF61472}"/>
+                <a16:creationId xmlns:a16="http://schemas.microsoft.com/office/drawing/2014/main" id="{24B9CF47-B729-481D-82C0-44CB4DA6CE5C}"/>
               </a:ext>
             </a:extLst>
           </p:cNvPr>
@@ -4710,7 +4710,7 @@
           <p:cNvPr id="6" name="">
             <a:extLst xmlns:a="http://schemas.openxmlformats.org/drawingml/2006/main">
               <a:ext uri="{FF2B5EF4-FFF2-40B4-BE49-F238E27FC236}">
-                <a16:creationId xmlns:a16="http://schemas.microsoft.com/office/drawing/2014/main" id="{AB7C6F5F-A1AF-4893-9F95-1F998334C32C}"/>
+                <a16:creationId xmlns:a16="http://schemas.microsoft.com/office/drawing/2014/main" id="{6E4418D4-59B2-4552-AF41-299A1945A18A}"/>
               </a:ext>
             </a:extLst>
           </p:cNvPr>
@@ -4737,7 +4737,7 @@
           <p:cNvPr id="7" name="">
             <a:extLst xmlns:a="http://schemas.openxmlformats.org/drawingml/2006/main">
               <a:ext uri="{FF2B5EF4-FFF2-40B4-BE49-F238E27FC236}">
-                <a16:creationId xmlns:a16="http://schemas.microsoft.com/office/drawing/2014/main" id="{90D0E698-4E51-41B3-BC2D-CDC5130947B6}"/>
+                <a16:creationId xmlns:a16="http://schemas.microsoft.com/office/drawing/2014/main" id="{393AE0BE-E94F-4CE6-91E4-3AEF48789090}"/>
               </a:ext>
             </a:extLst>
           </p:cNvPr>
@@ -4782,7 +4782,7 @@
           <p:cNvPr id="8" name="">
             <a:extLst xmlns:a="http://schemas.openxmlformats.org/drawingml/2006/main">
               <a:ext uri="{FF2B5EF4-FFF2-40B4-BE49-F238E27FC236}">
-                <a16:creationId xmlns:a16="http://schemas.microsoft.com/office/drawing/2014/main" id="{924C2564-7C7C-46C6-86D6-C3054352F9A0}"/>
+                <a16:creationId xmlns:a16="http://schemas.microsoft.com/office/drawing/2014/main" id="{C60BA8E0-66CE-4218-AAD9-CD25E9EEFB61}"/>
               </a:ext>
             </a:extLst>
           </p:cNvPr>
@@ -4809,7 +4809,7 @@
           <p:cNvPr id="9" name="">
             <a:extLst xmlns:a="http://schemas.openxmlformats.org/drawingml/2006/main">
               <a:ext uri="{FF2B5EF4-FFF2-40B4-BE49-F238E27FC236}">
-                <a16:creationId xmlns:a16="http://schemas.microsoft.com/office/drawing/2014/main" id="{CE33D15A-F9EF-4D9E-8448-02E01222A578}"/>
+                <a16:creationId xmlns:a16="http://schemas.microsoft.com/office/drawing/2014/main" id="{4A8ACCB5-3671-4A85-9D7C-7A9447880DDA}"/>
               </a:ext>
             </a:extLst>
           </p:cNvPr>
@@ -4854,7 +4854,7 @@
           <p:cNvPr id="10" name="">
             <a:extLst xmlns:a="http://schemas.openxmlformats.org/drawingml/2006/main">
               <a:ext uri="{FF2B5EF4-FFF2-40B4-BE49-F238E27FC236}">
-                <a16:creationId xmlns:a16="http://schemas.microsoft.com/office/drawing/2014/main" id="{CBDCF967-C0AC-45FA-87F9-CA6A0D613637}"/>
+                <a16:creationId xmlns:a16="http://schemas.microsoft.com/office/drawing/2014/main" id="{D921A8B5-7DFE-45DA-A1A7-6BEE63CEAFC0}"/>
               </a:ext>
             </a:extLst>
           </p:cNvPr>
@@ -4881,7 +4881,7 @@
           <p:cNvPr id="11" name="">
             <a:extLst xmlns:a="http://schemas.openxmlformats.org/drawingml/2006/main">
               <a:ext uri="{FF2B5EF4-FFF2-40B4-BE49-F238E27FC236}">
-                <a16:creationId xmlns:a16="http://schemas.microsoft.com/office/drawing/2014/main" id="{2DB35CBA-5774-4CFD-9A53-4ACB80887FFF}"/>
+                <a16:creationId xmlns:a16="http://schemas.microsoft.com/office/drawing/2014/main" id="{95803B7D-F991-4718-AB1D-0C1643770691}"/>
               </a:ext>
             </a:extLst>
           </p:cNvPr>
@@ -4926,7 +4926,7 @@
           <p:cNvPr id="12" name="">
             <a:extLst xmlns:a="http://schemas.openxmlformats.org/drawingml/2006/main">
               <a:ext uri="{FF2B5EF4-FFF2-40B4-BE49-F238E27FC236}">
-                <a16:creationId xmlns:a16="http://schemas.microsoft.com/office/drawing/2014/main" id="{B5363517-A1D7-458E-97AD-0BA1F9956213}"/>
+                <a16:creationId xmlns:a16="http://schemas.microsoft.com/office/drawing/2014/main" id="{24498B0D-C077-46A1-B494-C63020DFFFE9}"/>
               </a:ext>
             </a:extLst>
           </p:cNvPr>
@@ -4953,7 +4953,7 @@
           <p:cNvPr id="13" name="">
             <a:extLst xmlns:a="http://schemas.openxmlformats.org/drawingml/2006/main">
               <a:ext uri="{FF2B5EF4-FFF2-40B4-BE49-F238E27FC236}">
-                <a16:creationId xmlns:a16="http://schemas.microsoft.com/office/drawing/2014/main" id="{F1FCE313-9AE1-48C3-BFC8-970B2FD81559}"/>
+                <a16:creationId xmlns:a16="http://schemas.microsoft.com/office/drawing/2014/main" id="{DCF78318-3F8A-4B32-869E-737899DBC5FF}"/>
               </a:ext>
             </a:extLst>
           </p:cNvPr>
@@ -4998,7 +4998,7 @@
           <p:cNvPr id="14" name="">
             <a:extLst xmlns:a="http://schemas.openxmlformats.org/drawingml/2006/main">
               <a:ext uri="{FF2B5EF4-FFF2-40B4-BE49-F238E27FC236}">
-                <a16:creationId xmlns:a16="http://schemas.microsoft.com/office/drawing/2014/main" id="{93AD46B8-62CE-455E-88EF-60C677726BFC}"/>
+                <a16:creationId xmlns:a16="http://schemas.microsoft.com/office/drawing/2014/main" id="{BA0DD1D2-94D9-4F29-B08B-587BD6374032}"/>
               </a:ext>
             </a:extLst>
           </p:cNvPr>
@@ -5025,7 +5025,7 @@
           <p:cNvPr id="15" name="">
             <a:extLst xmlns:a="http://schemas.openxmlformats.org/drawingml/2006/main">
               <a:ext uri="{FF2B5EF4-FFF2-40B4-BE49-F238E27FC236}">
-                <a16:creationId xmlns:a16="http://schemas.microsoft.com/office/drawing/2014/main" id="{8334FE7C-D388-4B39-B710-52FD4E2A8184}"/>
+                <a16:creationId xmlns:a16="http://schemas.microsoft.com/office/drawing/2014/main" id="{FA2F2DB3-EE60-40A0-BF6B-38D6B20C8955}"/>
               </a:ext>
             </a:extLst>
           </p:cNvPr>
@@ -5070,7 +5070,7 @@
           <p:cNvPr id="16" name="">
             <a:extLst xmlns:a="http://schemas.openxmlformats.org/drawingml/2006/main">
               <a:ext uri="{FF2B5EF4-FFF2-40B4-BE49-F238E27FC236}">
-                <a16:creationId xmlns:a16="http://schemas.microsoft.com/office/drawing/2014/main" id="{10DD52C6-40EB-47EF-98DE-853ED481F21A}"/>
+                <a16:creationId xmlns:a16="http://schemas.microsoft.com/office/drawing/2014/main" id="{DD37B91D-FDCB-40B6-BE56-3D9697D1F4C7}"/>
               </a:ext>
             </a:extLst>
           </p:cNvPr>
@@ -5097,7 +5097,7 @@
           <p:cNvPr id="17" name="">
             <a:extLst xmlns:a="http://schemas.openxmlformats.org/drawingml/2006/main">
               <a:ext uri="{FF2B5EF4-FFF2-40B4-BE49-F238E27FC236}">
-                <a16:creationId xmlns:a16="http://schemas.microsoft.com/office/drawing/2014/main" id="{80BBC47B-053B-4EF1-9BF8-14B3F10DBA17}"/>
+                <a16:creationId xmlns:a16="http://schemas.microsoft.com/office/drawing/2014/main" id="{888AB21E-D9F6-4179-B8F3-CDA8D75FE4C3}"/>
               </a:ext>
             </a:extLst>
           </p:cNvPr>
@@ -5142,7 +5142,7 @@
           <p:cNvPr id="18" name="">
             <a:extLst xmlns:a="http://schemas.openxmlformats.org/drawingml/2006/main">
               <a:ext uri="{FF2B5EF4-FFF2-40B4-BE49-F238E27FC236}">
-                <a16:creationId xmlns:a16="http://schemas.microsoft.com/office/drawing/2014/main" id="{52F4A0F9-1272-4355-9FE1-759E1463B7D0}"/>
+                <a16:creationId xmlns:a16="http://schemas.microsoft.com/office/drawing/2014/main" id="{CDFC9DFB-FB3F-4522-B139-21A4F29952D6}"/>
               </a:ext>
             </a:extLst>
           </p:cNvPr>
@@ -5169,7 +5169,7 @@
           <p:cNvPr id="19" name="">
             <a:extLst xmlns:a="http://schemas.openxmlformats.org/drawingml/2006/main">
               <a:ext uri="{FF2B5EF4-FFF2-40B4-BE49-F238E27FC236}">
-                <a16:creationId xmlns:a16="http://schemas.microsoft.com/office/drawing/2014/main" id="{1E763C02-D807-4C85-9959-ADCDBE3C72F5}"/>
+                <a16:creationId xmlns:a16="http://schemas.microsoft.com/office/drawing/2014/main" id="{151ECCB4-B34D-49CE-9207-F8FCD5A04A78}"/>
               </a:ext>
             </a:extLst>
           </p:cNvPr>
@@ -5214,7 +5214,7 @@
           <p:cNvPr id="20" name="">
             <a:extLst xmlns:a="http://schemas.openxmlformats.org/drawingml/2006/main">
               <a:ext uri="{FF2B5EF4-FFF2-40B4-BE49-F238E27FC236}">
-                <a16:creationId xmlns:a16="http://schemas.microsoft.com/office/drawing/2014/main" id="{8DF31C33-B27B-42C1-B4CB-F128FC6BFD1A}"/>
+                <a16:creationId xmlns:a16="http://schemas.microsoft.com/office/drawing/2014/main" id="{432141DD-997F-4464-9BD4-5B42290A5A6F}"/>
               </a:ext>
             </a:extLst>
           </p:cNvPr>
@@ -5241,7 +5241,7 @@
           <p:cNvPr id="21" name="">
             <a:extLst xmlns:a="http://schemas.openxmlformats.org/drawingml/2006/main">
               <a:ext uri="{FF2B5EF4-FFF2-40B4-BE49-F238E27FC236}">
-                <a16:creationId xmlns:a16="http://schemas.microsoft.com/office/drawing/2014/main" id="{297B15C0-0D19-49E0-BFDB-259CFF2E8D80}"/>
+                <a16:creationId xmlns:a16="http://schemas.microsoft.com/office/drawing/2014/main" id="{E4B9AB1C-CB3A-468E-97E4-C94FFB740736}"/>
               </a:ext>
             </a:extLst>
           </p:cNvPr>
@@ -5286,7 +5286,7 @@
           <p:cNvPr id="22" name="">
             <a:extLst xmlns:a="http://schemas.openxmlformats.org/drawingml/2006/main">
               <a:ext uri="{FF2B5EF4-FFF2-40B4-BE49-F238E27FC236}">
-                <a16:creationId xmlns:a16="http://schemas.microsoft.com/office/drawing/2014/main" id="{8FD34D6F-A0D7-4F82-9A06-BF3686883AE4}"/>
+                <a16:creationId xmlns:a16="http://schemas.microsoft.com/office/drawing/2014/main" id="{6D01FCB5-9920-4EE8-92F9-D28EF5A88B1A}"/>
               </a:ext>
             </a:extLst>
           </p:cNvPr>
@@ -5313,7 +5313,7 @@
           <p:cNvPr id="23" name="">
             <a:extLst xmlns:a="http://schemas.openxmlformats.org/drawingml/2006/main">
               <a:ext uri="{FF2B5EF4-FFF2-40B4-BE49-F238E27FC236}">
-                <a16:creationId xmlns:a16="http://schemas.microsoft.com/office/drawing/2014/main" id="{A7F4536A-FE38-42DD-83EE-55C8B5A4C116}"/>
+                <a16:creationId xmlns:a16="http://schemas.microsoft.com/office/drawing/2014/main" id="{105F12FF-6462-47D2-A8BF-210AD5E83C55}"/>
               </a:ext>
             </a:extLst>
           </p:cNvPr>
@@ -5358,7 +5358,7 @@
           <p:cNvPr id="24" name="">
             <a:extLst xmlns:a="http://schemas.openxmlformats.org/drawingml/2006/main">
               <a:ext uri="{FF2B5EF4-FFF2-40B4-BE49-F238E27FC236}">
-                <a16:creationId xmlns:a16="http://schemas.microsoft.com/office/drawing/2014/main" id="{ABFBC101-9C90-4602-BC32-FB9AE3F9EB5A}"/>
+                <a16:creationId xmlns:a16="http://schemas.microsoft.com/office/drawing/2014/main" id="{03D20B48-D92B-4053-BFAB-39B2ABD5D699}"/>
               </a:ext>
             </a:extLst>
           </p:cNvPr>
@@ -5385,7 +5385,7 @@
           <p:cNvPr id="25" name="">
             <a:extLst xmlns:a="http://schemas.openxmlformats.org/drawingml/2006/main">
               <a:ext uri="{FF2B5EF4-FFF2-40B4-BE49-F238E27FC236}">
-                <a16:creationId xmlns:a16="http://schemas.microsoft.com/office/drawing/2014/main" id="{49184655-A1F7-47EA-B2A1-97E964EFE0BB}"/>
+                <a16:creationId xmlns:a16="http://schemas.microsoft.com/office/drawing/2014/main" id="{9C4B35E4-35E1-4A4E-A8BA-6C58DF0AC154}"/>
               </a:ext>
             </a:extLst>
           </p:cNvPr>
@@ -5430,7 +5430,7 @@
           <p:cNvPr id="26" name="">
             <a:extLst xmlns:a="http://schemas.openxmlformats.org/drawingml/2006/main">
               <a:ext uri="{FF2B5EF4-FFF2-40B4-BE49-F238E27FC236}">
-                <a16:creationId xmlns:a16="http://schemas.microsoft.com/office/drawing/2014/main" id="{A8879B8C-1E18-4092-8182-9823CBF410A1}"/>
+                <a16:creationId xmlns:a16="http://schemas.microsoft.com/office/drawing/2014/main" id="{313BD99D-1193-44A0-9CE6-D3B6F6DEC3A2}"/>
               </a:ext>
             </a:extLst>
           </p:cNvPr>
@@ -5457,7 +5457,7 @@
           <p:cNvPr id="27" name="">
             <a:extLst xmlns:a="http://schemas.openxmlformats.org/drawingml/2006/main">
               <a:ext uri="{FF2B5EF4-FFF2-40B4-BE49-F238E27FC236}">
-                <a16:creationId xmlns:a16="http://schemas.microsoft.com/office/drawing/2014/main" id="{EE46025C-1C08-4F8D-A791-7FA1CBB1FF11}"/>
+                <a16:creationId xmlns:a16="http://schemas.microsoft.com/office/drawing/2014/main" id="{EB497D4D-3E44-4780-9F4E-98E283265EF8}"/>
               </a:ext>
             </a:extLst>
           </p:cNvPr>
@@ -5502,7 +5502,7 @@
           <p:cNvPr id="28" name="">
             <a:extLst xmlns:a="http://schemas.openxmlformats.org/drawingml/2006/main">
               <a:ext uri="{FF2B5EF4-FFF2-40B4-BE49-F238E27FC236}">
-                <a16:creationId xmlns:a16="http://schemas.microsoft.com/office/drawing/2014/main" id="{08C9F3F5-2420-4B75-A29A-68F9A0859234}"/>
+                <a16:creationId xmlns:a16="http://schemas.microsoft.com/office/drawing/2014/main" id="{03F08BB5-36D4-4C6C-BF5A-BF47B60DEA99}"/>
               </a:ext>
             </a:extLst>
           </p:cNvPr>
@@ -5529,7 +5529,7 @@
           <p:cNvPr id="29" name="">
             <a:extLst xmlns:a="http://schemas.openxmlformats.org/drawingml/2006/main">
               <a:ext uri="{FF2B5EF4-FFF2-40B4-BE49-F238E27FC236}">
-                <a16:creationId xmlns:a16="http://schemas.microsoft.com/office/drawing/2014/main" id="{ED2587B8-2247-4E0F-BB35-9072E77782CD}"/>
+                <a16:creationId xmlns:a16="http://schemas.microsoft.com/office/drawing/2014/main" id="{0ACF0935-A113-4F8A-8AE1-3632C258B216}"/>
               </a:ext>
             </a:extLst>
           </p:cNvPr>
@@ -5574,7 +5574,7 @@
           <p:cNvPr id="30" name="">
             <a:extLst xmlns:a="http://schemas.openxmlformats.org/drawingml/2006/main">
               <a:ext uri="{FF2B5EF4-FFF2-40B4-BE49-F238E27FC236}">
-                <a16:creationId xmlns:a16="http://schemas.microsoft.com/office/drawing/2014/main" id="{3ECA9926-E17A-4A93-AB20-FD986F7AEA5F}"/>
+                <a16:creationId xmlns:a16="http://schemas.microsoft.com/office/drawing/2014/main" id="{8D0635DA-8487-4B63-A7C2-2AC149ACD7EC}"/>
               </a:ext>
             </a:extLst>
           </p:cNvPr>
@@ -5601,7 +5601,7 @@
           <p:cNvPr id="31" name="">
             <a:extLst xmlns:a="http://schemas.openxmlformats.org/drawingml/2006/main">
               <a:ext uri="{FF2B5EF4-FFF2-40B4-BE49-F238E27FC236}">
-                <a16:creationId xmlns:a16="http://schemas.microsoft.com/office/drawing/2014/main" id="{44686332-DA11-48F6-8D77-AEADA6C988DF}"/>
+                <a16:creationId xmlns:a16="http://schemas.microsoft.com/office/drawing/2014/main" id="{0E7A7E65-D8BA-43A9-ABDC-36CD19F83198}"/>
               </a:ext>
             </a:extLst>
           </p:cNvPr>
@@ -5646,7 +5646,7 @@
           <p:cNvPr id="32" name="">
             <a:extLst xmlns:a="http://schemas.openxmlformats.org/drawingml/2006/main">
               <a:ext uri="{FF2B5EF4-FFF2-40B4-BE49-F238E27FC236}">
-                <a16:creationId xmlns:a16="http://schemas.microsoft.com/office/drawing/2014/main" id="{BE76D6BF-D5BC-4CDD-B4FA-A26131A96A01}"/>
+                <a16:creationId xmlns:a16="http://schemas.microsoft.com/office/drawing/2014/main" id="{B36E932F-9D98-4D12-8467-63969028E0AF}"/>
               </a:ext>
             </a:extLst>
           </p:cNvPr>
@@ -5673,7 +5673,7 @@
           <p:cNvPr id="33" name="">
             <a:extLst xmlns:a="http://schemas.openxmlformats.org/drawingml/2006/main">
               <a:ext uri="{FF2B5EF4-FFF2-40B4-BE49-F238E27FC236}">
-                <a16:creationId xmlns:a16="http://schemas.microsoft.com/office/drawing/2014/main" id="{6BCA5290-AEA7-4DBC-AEE1-8C825A4F40C9}"/>
+                <a16:creationId xmlns:a16="http://schemas.microsoft.com/office/drawing/2014/main" id="{F9FB2E3C-D710-4090-A23A-3B292DB07CFE}"/>
               </a:ext>
             </a:extLst>
           </p:cNvPr>
@@ -5718,7 +5718,7 @@
           <p:cNvPr id="34" name="">
             <a:extLst xmlns:a="http://schemas.openxmlformats.org/drawingml/2006/main">
               <a:ext uri="{FF2B5EF4-FFF2-40B4-BE49-F238E27FC236}">
-                <a16:creationId xmlns:a16="http://schemas.microsoft.com/office/drawing/2014/main" id="{D8D3FED7-0D5B-4FE0-BB5C-2ED8852E771C}"/>
+                <a16:creationId xmlns:a16="http://schemas.microsoft.com/office/drawing/2014/main" id="{B55E913E-24EC-4E7B-AA01-A9AF922022CB}"/>
               </a:ext>
             </a:extLst>
           </p:cNvPr>
@@ -5745,7 +5745,7 @@
           <p:cNvPr id="35" name="">
             <a:extLst xmlns:a="http://schemas.openxmlformats.org/drawingml/2006/main">
               <a:ext uri="{FF2B5EF4-FFF2-40B4-BE49-F238E27FC236}">
-                <a16:creationId xmlns:a16="http://schemas.microsoft.com/office/drawing/2014/main" id="{04B2F192-25A8-41A8-8B96-82B837D2C125}"/>
+                <a16:creationId xmlns:a16="http://schemas.microsoft.com/office/drawing/2014/main" id="{17374A02-96F4-455B-80C2-1F97F9AA4668}"/>
               </a:ext>
             </a:extLst>
           </p:cNvPr>
@@ -5790,7 +5790,7 @@
           <p:cNvPr id="36" name="">
             <a:extLst xmlns:a="http://schemas.openxmlformats.org/drawingml/2006/main">
               <a:ext uri="{FF2B5EF4-FFF2-40B4-BE49-F238E27FC236}">
-                <a16:creationId xmlns:a16="http://schemas.microsoft.com/office/drawing/2014/main" id="{B09799B4-2F7D-41D8-8274-E9216CC2A576}"/>
+                <a16:creationId xmlns:a16="http://schemas.microsoft.com/office/drawing/2014/main" id="{211356FD-D330-40B7-812D-361FE43BBA25}"/>
               </a:ext>
             </a:extLst>
           </p:cNvPr>
@@ -5817,7 +5817,7 @@
           <p:cNvPr id="37" name="">
             <a:extLst xmlns:a="http://schemas.openxmlformats.org/drawingml/2006/main">
               <a:ext uri="{FF2B5EF4-FFF2-40B4-BE49-F238E27FC236}">
-                <a16:creationId xmlns:a16="http://schemas.microsoft.com/office/drawing/2014/main" id="{145C61FC-9B48-4BF4-8786-1FD16BF3C180}"/>
+                <a16:creationId xmlns:a16="http://schemas.microsoft.com/office/drawing/2014/main" id="{2FFAD45B-AB57-4004-A9F4-B898026CB2C3}"/>
               </a:ext>
             </a:extLst>
           </p:cNvPr>
@@ -5862,7 +5862,7 @@
           <p:cNvPr id="38" name="">
             <a:extLst xmlns:a="http://schemas.openxmlformats.org/drawingml/2006/main">
               <a:ext uri="{FF2B5EF4-FFF2-40B4-BE49-F238E27FC236}">
-                <a16:creationId xmlns:a16="http://schemas.microsoft.com/office/drawing/2014/main" id="{581F9799-C007-4C99-9043-3564B978B82D}"/>
+                <a16:creationId xmlns:a16="http://schemas.microsoft.com/office/drawing/2014/main" id="{ACCF4B28-E666-476F-9F2D-B15843C4D1CA}"/>
               </a:ext>
             </a:extLst>
           </p:cNvPr>
@@ -5889,7 +5889,7 @@
           <p:cNvPr id="39" name="">
             <a:extLst xmlns:a="http://schemas.openxmlformats.org/drawingml/2006/main">
               <a:ext uri="{FF2B5EF4-FFF2-40B4-BE49-F238E27FC236}">
-                <a16:creationId xmlns:a16="http://schemas.microsoft.com/office/drawing/2014/main" id="{E1CD925A-DB89-4915-9EE3-7361862BB2CD}"/>
+                <a16:creationId xmlns:a16="http://schemas.microsoft.com/office/drawing/2014/main" id="{44E69FBF-D72C-445B-9410-F5D534BA1C36}"/>
               </a:ext>
             </a:extLst>
           </p:cNvPr>
@@ -5934,7 +5934,7 @@
           <p:cNvPr id="40" name="">
             <a:extLst xmlns:a="http://schemas.openxmlformats.org/drawingml/2006/main">
               <a:ext uri="{FF2B5EF4-FFF2-40B4-BE49-F238E27FC236}">
-                <a16:creationId xmlns:a16="http://schemas.microsoft.com/office/drawing/2014/main" id="{700A4FF0-BBE7-4986-998D-17F7F237638A}"/>
+                <a16:creationId xmlns:a16="http://schemas.microsoft.com/office/drawing/2014/main" id="{55255856-4970-4536-8F54-05CCAC1B9C69}"/>
               </a:ext>
             </a:extLst>
           </p:cNvPr>
@@ -5961,7 +5961,7 @@
           <p:cNvPr id="41" name="">
             <a:extLst xmlns:a="http://schemas.openxmlformats.org/drawingml/2006/main">
               <a:ext uri="{FF2B5EF4-FFF2-40B4-BE49-F238E27FC236}">
-                <a16:creationId xmlns:a16="http://schemas.microsoft.com/office/drawing/2014/main" id="{14106C85-83F8-4649-9AC3-82F0A1A104D5}"/>
+                <a16:creationId xmlns:a16="http://schemas.microsoft.com/office/drawing/2014/main" id="{EA5B2CDD-3C52-4708-9FBD-D75BD0E9D693}"/>
               </a:ext>
             </a:extLst>
           </p:cNvPr>
@@ -6006,7 +6006,7 @@
           <p:cNvPr id="42" name="">
             <a:extLst xmlns:a="http://schemas.openxmlformats.org/drawingml/2006/main">
               <a:ext uri="{FF2B5EF4-FFF2-40B4-BE49-F238E27FC236}">
-                <a16:creationId xmlns:a16="http://schemas.microsoft.com/office/drawing/2014/main" id="{A2F86ADF-6CCC-4A66-927B-5F5F0DCF7302}"/>
+                <a16:creationId xmlns:a16="http://schemas.microsoft.com/office/drawing/2014/main" id="{6CD4A175-CB69-4367-97D2-9A3772C21090}"/>
               </a:ext>
             </a:extLst>
           </p:cNvPr>
@@ -6033,7 +6033,7 @@
           <p:cNvPr id="43" name="">
             <a:extLst xmlns:a="http://schemas.openxmlformats.org/drawingml/2006/main">
               <a:ext uri="{FF2B5EF4-FFF2-40B4-BE49-F238E27FC236}">
-                <a16:creationId xmlns:a16="http://schemas.microsoft.com/office/drawing/2014/main" id="{1A45FA69-5416-4C44-8627-941D7184A51B}"/>
+                <a16:creationId xmlns:a16="http://schemas.microsoft.com/office/drawing/2014/main" id="{E26FE62E-D716-4128-9342-9DB28039F1DA}"/>
               </a:ext>
             </a:extLst>
           </p:cNvPr>
@@ -6078,7 +6078,7 @@
           <p:cNvPr id="44" name="">
             <a:extLst xmlns:a="http://schemas.openxmlformats.org/drawingml/2006/main">
               <a:ext uri="{FF2B5EF4-FFF2-40B4-BE49-F238E27FC236}">
-                <a16:creationId xmlns:a16="http://schemas.microsoft.com/office/drawing/2014/main" id="{72165C28-5305-40F1-9594-3E9C47D3CD4F}"/>
+                <a16:creationId xmlns:a16="http://schemas.microsoft.com/office/drawing/2014/main" id="{F5E3F669-42FB-4642-AF5F-FF375BBDCF94}"/>
               </a:ext>
             </a:extLst>
           </p:cNvPr>
@@ -6105,7 +6105,7 @@
           <p:cNvPr id="45" name="">
             <a:extLst xmlns:a="http://schemas.openxmlformats.org/drawingml/2006/main">
               <a:ext uri="{FF2B5EF4-FFF2-40B4-BE49-F238E27FC236}">
-                <a16:creationId xmlns:a16="http://schemas.microsoft.com/office/drawing/2014/main" id="{560EC6F7-7F0D-40CC-804D-88BE365862A2}"/>
+                <a16:creationId xmlns:a16="http://schemas.microsoft.com/office/drawing/2014/main" id="{A7D93420-75AB-4280-803D-336B4F811445}"/>
               </a:ext>
             </a:extLst>
           </p:cNvPr>
@@ -6150,7 +6150,7 @@
           <p:cNvPr id="46" name="">
             <a:extLst xmlns:a="http://schemas.openxmlformats.org/drawingml/2006/main">
               <a:ext uri="{FF2B5EF4-FFF2-40B4-BE49-F238E27FC236}">
-                <a16:creationId xmlns:a16="http://schemas.microsoft.com/office/drawing/2014/main" id="{01154A2E-04D4-4BDB-A358-20CD420085D7}"/>
+                <a16:creationId xmlns:a16="http://schemas.microsoft.com/office/drawing/2014/main" id="{F998928F-F213-41B9-83DD-8D8AF27C6A32}"/>
               </a:ext>
             </a:extLst>
           </p:cNvPr>
@@ -6177,7 +6177,7 @@
           <p:cNvPr id="47" name="">
             <a:extLst xmlns:a="http://schemas.openxmlformats.org/drawingml/2006/main">
               <a:ext uri="{FF2B5EF4-FFF2-40B4-BE49-F238E27FC236}">
-                <a16:creationId xmlns:a16="http://schemas.microsoft.com/office/drawing/2014/main" id="{795437A7-FEFD-44BF-8AC4-39E0C234330B}"/>
+                <a16:creationId xmlns:a16="http://schemas.microsoft.com/office/drawing/2014/main" id="{2621886B-0327-4A03-AD96-251017B915FE}"/>
               </a:ext>
             </a:extLst>
           </p:cNvPr>
@@ -6226,10 +6226,10 @@
           <p:nvPr/>
         </p:nvPicPr>
         <p:blipFill>
-          <a:blip xmlns:r="http://schemas.openxmlformats.org/officeDocument/2006/relationships" xmlns:a="http://schemas.openxmlformats.org/drawingml/2006/main" r:embed="R2979157c86f34aaf">
+          <a:blip xmlns:r="http://schemas.openxmlformats.org/officeDocument/2006/relationships" xmlns:a="http://schemas.openxmlformats.org/drawingml/2006/main" r:embed="R26634b693b534a83">
             <a:extLst>
               <a:ext uri="{96DAC541-7B7A-43D3-8B79-37D633B846F1}">
-                <asvg:svgBlip xmlns:asvg="http://schemas.microsoft.com/office/drawing/2016/SVG/main" r:embed="Rff35bf2d3dfa4a08"/>
+                <asvg:svgBlip xmlns:asvg="http://schemas.microsoft.com/office/drawing/2016/SVG/main" r:embed="R98bea5a3c4aa4541"/>
               </a:ext>
             </a:extLst>
           </a:blip>
@@ -6250,7 +6250,7 @@
           <p:cNvPr id="49" name="footer">
             <a:extLst xmlns:a="http://schemas.openxmlformats.org/drawingml/2006/main">
               <a:ext uri="{FF2B5EF4-FFF2-40B4-BE49-F238E27FC236}">
-                <a16:creationId xmlns:a16="http://schemas.microsoft.com/office/drawing/2014/main" id="{8D99706A-6203-43BE-9218-B2A5AC4AF25F}"/>
+                <a16:creationId xmlns:a16="http://schemas.microsoft.com/office/drawing/2014/main" id="{131C4243-DB32-49DA-96E9-BD3CEC817645}"/>
               </a:ext>
             </a:extLst>
           </p:cNvPr>
@@ -6293,7 +6293,7 @@
     </p:spTree>
     <p:extLst>
       <p:ext uri="{BB962C8B-B14F-4D97-AF65-F5344CB8AC3E}">
-        <p14:creationId xmlns:p14="http://schemas.microsoft.com/office/powerpoint/2010/main" val="1007265533"/>
+        <p14:creationId xmlns:p14="http://schemas.microsoft.com/office/powerpoint/2010/main" val="530680419"/>
       </p:ext>
     </p:extLst>
   </p:cSld>
@@ -6317,7 +6317,7 @@
           <p:cNvPr id="1" name="slide-title">
             <a:extLst xmlns:a="http://schemas.openxmlformats.org/drawingml/2006/main">
               <a:ext uri="{FF2B5EF4-FFF2-40B4-BE49-F238E27FC236}">
-                <a16:creationId xmlns:a16="http://schemas.microsoft.com/office/drawing/2014/main" id="{481522D7-D2F5-45BE-B26F-6167967AC56B}"/>
+                <a16:creationId xmlns:a16="http://schemas.microsoft.com/office/drawing/2014/main" id="{3523D5DD-7580-4D31-9915-D98DAE6C7053}"/>
               </a:ext>
             </a:extLst>
           </p:cNvPr>
@@ -6362,7 +6362,7 @@
           <p:cNvPr id="2" name="">
             <a:extLst xmlns:a="http://schemas.openxmlformats.org/drawingml/2006/main">
               <a:ext uri="{FF2B5EF4-FFF2-40B4-BE49-F238E27FC236}">
-                <a16:creationId xmlns:a16="http://schemas.microsoft.com/office/drawing/2014/main" id="{AB716159-E6D3-444D-B6CF-0F2A2D675143}"/>
+                <a16:creationId xmlns:a16="http://schemas.microsoft.com/office/drawing/2014/main" id="{3A2A4843-5929-4D41-9BA6-BBBE2C651CE4}"/>
               </a:ext>
             </a:extLst>
           </p:cNvPr>
@@ -6399,10 +6399,10 @@
           <p:nvPr/>
         </p:nvPicPr>
         <p:blipFill>
-          <a:blip xmlns:r="http://schemas.openxmlformats.org/officeDocument/2006/relationships" xmlns:a="http://schemas.openxmlformats.org/drawingml/2006/main" r:embed="Rec295725d2b74001">
+          <a:blip xmlns:r="http://schemas.openxmlformats.org/officeDocument/2006/relationships" xmlns:a="http://schemas.openxmlformats.org/drawingml/2006/main" r:embed="R1cbb58668308417c">
             <a:extLst>
               <a:ext uri="{96DAC541-7B7A-43D3-8B79-37D633B846F1}">
-                <asvg:svgBlip xmlns:asvg="http://schemas.microsoft.com/office/drawing/2016/SVG/main" r:embed="R011b216e93c04761"/>
+                <asvg:svgBlip xmlns:asvg="http://schemas.microsoft.com/office/drawing/2016/SVG/main" r:embed="R0eb7b5e64c324621"/>
               </a:ext>
             </a:extLst>
           </a:blip>
@@ -6423,7 +6423,7 @@
           <p:cNvPr id="4" name="">
             <a:extLst xmlns:a="http://schemas.openxmlformats.org/drawingml/2006/main">
               <a:ext uri="{FF2B5EF4-FFF2-40B4-BE49-F238E27FC236}">
-                <a16:creationId xmlns:a16="http://schemas.microsoft.com/office/drawing/2014/main" id="{0A9F9578-23D2-43A5-8BD9-DD68B6C9AAEB}"/>
+                <a16:creationId xmlns:a16="http://schemas.microsoft.com/office/drawing/2014/main" id="{B4D90995-87BE-4F69-974C-1DFF633981B9}"/>
               </a:ext>
             </a:extLst>
           </p:cNvPr>
@@ -6452,7 +6452,7 @@
           <p:cNvPr id="5" name="">
             <a:extLst xmlns:a="http://schemas.openxmlformats.org/drawingml/2006/main">
               <a:ext uri="{FF2B5EF4-FFF2-40B4-BE49-F238E27FC236}">
-                <a16:creationId xmlns:a16="http://schemas.microsoft.com/office/drawing/2014/main" id="{A2D5C12E-A4ED-4A04-A06B-69CB66966C32}"/>
+                <a16:creationId xmlns:a16="http://schemas.microsoft.com/office/drawing/2014/main" id="{557A333A-EC44-4727-8B71-EE8E247B457C}"/>
               </a:ext>
             </a:extLst>
           </p:cNvPr>
@@ -6497,7 +6497,7 @@
           <p:cNvPr id="6" name="">
             <a:extLst xmlns:a="http://schemas.openxmlformats.org/drawingml/2006/main">
               <a:ext uri="{FF2B5EF4-FFF2-40B4-BE49-F238E27FC236}">
-                <a16:creationId xmlns:a16="http://schemas.microsoft.com/office/drawing/2014/main" id="{7BB0A2DB-2D49-45BB-8F9A-C420F9D2BF44}"/>
+                <a16:creationId xmlns:a16="http://schemas.microsoft.com/office/drawing/2014/main" id="{E64DC0DB-737B-448B-B49B-C218A6269AE8}"/>
               </a:ext>
             </a:extLst>
           </p:cNvPr>
@@ -6542,7 +6542,7 @@
           <p:cNvPr id="7" name="">
             <a:extLst xmlns:a="http://schemas.openxmlformats.org/drawingml/2006/main">
               <a:ext uri="{FF2B5EF4-FFF2-40B4-BE49-F238E27FC236}">
-                <a16:creationId xmlns:a16="http://schemas.microsoft.com/office/drawing/2014/main" id="{4883F334-F01A-430C-9FA0-DE9CBA60F387}"/>
+                <a16:creationId xmlns:a16="http://schemas.microsoft.com/office/drawing/2014/main" id="{2384892B-8E4A-4BA7-8A1A-E77603B4D612}"/>
               </a:ext>
             </a:extLst>
           </p:cNvPr>
@@ -6571,7 +6571,7 @@
           <p:cNvPr id="8" name="">
             <a:extLst xmlns:a="http://schemas.openxmlformats.org/drawingml/2006/main">
               <a:ext uri="{FF2B5EF4-FFF2-40B4-BE49-F238E27FC236}">
-                <a16:creationId xmlns:a16="http://schemas.microsoft.com/office/drawing/2014/main" id="{50B2381A-F83E-41C0-993F-401D31F8F20E}"/>
+                <a16:creationId xmlns:a16="http://schemas.microsoft.com/office/drawing/2014/main" id="{6BF39299-9BDD-455B-B0B1-06990D886C7B}"/>
               </a:ext>
             </a:extLst>
           </p:cNvPr>
@@ -6616,7 +6616,7 @@
           <p:cNvPr id="9" name="">
             <a:extLst xmlns:a="http://schemas.openxmlformats.org/drawingml/2006/main">
               <a:ext uri="{FF2B5EF4-FFF2-40B4-BE49-F238E27FC236}">
-                <a16:creationId xmlns:a16="http://schemas.microsoft.com/office/drawing/2014/main" id="{888BFE76-BB6C-4BAB-85F9-19F2B8C0D389}"/>
+                <a16:creationId xmlns:a16="http://schemas.microsoft.com/office/drawing/2014/main" id="{EF12CC25-52B8-4986-BABC-D6375F9F5FE9}"/>
               </a:ext>
             </a:extLst>
           </p:cNvPr>
@@ -6661,7 +6661,7 @@
           <p:cNvPr id="10" name="">
             <a:extLst xmlns:a="http://schemas.openxmlformats.org/drawingml/2006/main">
               <a:ext uri="{FF2B5EF4-FFF2-40B4-BE49-F238E27FC236}">
-                <a16:creationId xmlns:a16="http://schemas.microsoft.com/office/drawing/2014/main" id="{238B27ED-62CF-46A1-9D0C-E5D5247C0AE1}"/>
+                <a16:creationId xmlns:a16="http://schemas.microsoft.com/office/drawing/2014/main" id="{9B62F264-792F-49DA-97AC-008CBCC3F269}"/>
               </a:ext>
             </a:extLst>
           </p:cNvPr>
@@ -6690,7 +6690,7 @@
           <p:cNvPr id="11" name="">
             <a:extLst xmlns:a="http://schemas.openxmlformats.org/drawingml/2006/main">
               <a:ext uri="{FF2B5EF4-FFF2-40B4-BE49-F238E27FC236}">
-                <a16:creationId xmlns:a16="http://schemas.microsoft.com/office/drawing/2014/main" id="{DA38DAE7-3922-4A3F-9E2A-A841C6C8731B}"/>
+                <a16:creationId xmlns:a16="http://schemas.microsoft.com/office/drawing/2014/main" id="{A98F96C2-2F39-43A9-9553-7146B3345A6C}"/>
               </a:ext>
             </a:extLst>
           </p:cNvPr>
@@ -6735,7 +6735,7 @@
           <p:cNvPr id="12" name="">
             <a:extLst xmlns:a="http://schemas.openxmlformats.org/drawingml/2006/main">
               <a:ext uri="{FF2B5EF4-FFF2-40B4-BE49-F238E27FC236}">
-                <a16:creationId xmlns:a16="http://schemas.microsoft.com/office/drawing/2014/main" id="{9BDD7147-F52D-4BD1-A46B-2B08599A87FE}"/>
+                <a16:creationId xmlns:a16="http://schemas.microsoft.com/office/drawing/2014/main" id="{9DDE75D1-3522-4822-B5C3-A553F84717BE}"/>
               </a:ext>
             </a:extLst>
           </p:cNvPr>
@@ -6780,7 +6780,7 @@
           <p:cNvPr id="13" name="">
             <a:extLst xmlns:a="http://schemas.openxmlformats.org/drawingml/2006/main">
               <a:ext uri="{FF2B5EF4-FFF2-40B4-BE49-F238E27FC236}">
-                <a16:creationId xmlns:a16="http://schemas.microsoft.com/office/drawing/2014/main" id="{7175CC77-93A0-48E0-8FE3-BE38BFED46D5}"/>
+                <a16:creationId xmlns:a16="http://schemas.microsoft.com/office/drawing/2014/main" id="{A2FF839E-E0A0-49C9-B4A8-AC6B84935E30}"/>
               </a:ext>
             </a:extLst>
           </p:cNvPr>
@@ -6815,7 +6815,7 @@
                   <a:srgbClr val="526772"/>
                 </a:solidFill>
               </a:rPr>
-              <a:t>ModelSim: 22 CPU/PIC configurations   ·   Verilator: 16 benches with assertions bound to the RTL</a:t>
+              <a:t>ModelSim: 39 CPU/PIC runs   ·   Verilator: 17 benches, 53 runs with assertions bound to the RTL</a:t>
             </a:r>
           </a:p>
         </p:txBody>
@@ -6825,7 +6825,7 @@
           <p:cNvPr id="14" name="footer">
             <a:extLst xmlns:a="http://schemas.openxmlformats.org/drawingml/2006/main">
               <a:ext uri="{FF2B5EF4-FFF2-40B4-BE49-F238E27FC236}">
-                <a16:creationId xmlns:a16="http://schemas.microsoft.com/office/drawing/2014/main" id="{00AA7384-214B-4FB9-8E7F-F5C184D0E018}"/>
+                <a16:creationId xmlns:a16="http://schemas.microsoft.com/office/drawing/2014/main" id="{E666D4AF-94E9-4533-B7CF-872FAB09BF69}"/>
               </a:ext>
             </a:extLst>
           </p:cNvPr>
@@ -6868,7 +6868,7 @@
     </p:spTree>
     <p:extLst>
       <p:ext uri="{BB962C8B-B14F-4D97-AF65-F5344CB8AC3E}">
-        <p14:creationId xmlns:p14="http://schemas.microsoft.com/office/powerpoint/2010/main" val="126880974"/>
+        <p14:creationId xmlns:p14="http://schemas.microsoft.com/office/powerpoint/2010/main" val="324510132"/>
       </p:ext>
     </p:extLst>
   </p:cSld>
@@ -6892,7 +6892,7 @@
           <p:cNvPr id="1" name="slide-title">
             <a:extLst xmlns:a="http://schemas.openxmlformats.org/drawingml/2006/main">
               <a:ext uri="{FF2B5EF4-FFF2-40B4-BE49-F238E27FC236}">
-                <a16:creationId xmlns:a16="http://schemas.microsoft.com/office/drawing/2014/main" id="{3FDFB5FC-329B-4353-8DBC-CE04E74CF563}"/>
+                <a16:creationId xmlns:a16="http://schemas.microsoft.com/office/drawing/2014/main" id="{0E20D639-FB6F-4F83-BEB5-B0627E4110D3}"/>
               </a:ext>
             </a:extLst>
           </p:cNvPr>
@@ -6937,7 +6937,7 @@
           <p:cNvPr id="2" name="">
             <a:extLst xmlns:a="http://schemas.openxmlformats.org/drawingml/2006/main">
               <a:ext uri="{FF2B5EF4-FFF2-40B4-BE49-F238E27FC236}">
-                <a16:creationId xmlns:a16="http://schemas.microsoft.com/office/drawing/2014/main" id="{CBB13CB5-9416-4B38-8325-634CBF1CFF28}"/>
+                <a16:creationId xmlns:a16="http://schemas.microsoft.com/office/drawing/2014/main" id="{C61F3E58-C4A0-4292-AD01-38E3748E5EBE}"/>
               </a:ext>
             </a:extLst>
           </p:cNvPr>
@@ -6974,10 +6974,10 @@
           <p:nvPr/>
         </p:nvPicPr>
         <p:blipFill>
-          <a:blip xmlns:r="http://schemas.openxmlformats.org/officeDocument/2006/relationships" xmlns:a="http://schemas.openxmlformats.org/drawingml/2006/main" r:embed="R1a4de114dc794242">
+          <a:blip xmlns:r="http://schemas.openxmlformats.org/officeDocument/2006/relationships" xmlns:a="http://schemas.openxmlformats.org/drawingml/2006/main" r:embed="Rc921897532454949">
             <a:extLst>
               <a:ext uri="{96DAC541-7B7A-43D3-8B79-37D633B846F1}">
-                <asvg:svgBlip xmlns:asvg="http://schemas.microsoft.com/office/drawing/2016/SVG/main" r:embed="R355cc125cac246da"/>
+                <asvg:svgBlip xmlns:asvg="http://schemas.microsoft.com/office/drawing/2016/SVG/main" r:embed="Rc9384985d6464444"/>
               </a:ext>
             </a:extLst>
           </a:blip>
@@ -6998,7 +6998,7 @@
           <p:cNvPr id="4" name="">
             <a:extLst xmlns:a="http://schemas.openxmlformats.org/drawingml/2006/main">
               <a:ext uri="{FF2B5EF4-FFF2-40B4-BE49-F238E27FC236}">
-                <a16:creationId xmlns:a16="http://schemas.microsoft.com/office/drawing/2014/main" id="{663463B6-3534-4728-B027-81303C2E8CB6}"/>
+                <a16:creationId xmlns:a16="http://schemas.microsoft.com/office/drawing/2014/main" id="{59AE1794-8072-426B-B7E6-F4B0537BA649}"/>
               </a:ext>
             </a:extLst>
           </p:cNvPr>
@@ -7027,7 +7027,7 @@
           <p:cNvPr id="5" name="">
             <a:extLst xmlns:a="http://schemas.openxmlformats.org/drawingml/2006/main">
               <a:ext uri="{FF2B5EF4-FFF2-40B4-BE49-F238E27FC236}">
-                <a16:creationId xmlns:a16="http://schemas.microsoft.com/office/drawing/2014/main" id="{3AED43B3-E61E-4B5C-A6C7-1DED1C8592CF}"/>
+                <a16:creationId xmlns:a16="http://schemas.microsoft.com/office/drawing/2014/main" id="{EAAC2EE1-0D88-4617-94D8-E281B750F9B0}"/>
               </a:ext>
             </a:extLst>
           </p:cNvPr>
@@ -7072,7 +7072,7 @@
           <p:cNvPr id="6" name="">
             <a:extLst xmlns:a="http://schemas.openxmlformats.org/drawingml/2006/main">
               <a:ext uri="{FF2B5EF4-FFF2-40B4-BE49-F238E27FC236}">
-                <a16:creationId xmlns:a16="http://schemas.microsoft.com/office/drawing/2014/main" id="{8835F053-97A0-4C25-B57C-41720D1BE1E7}"/>
+                <a16:creationId xmlns:a16="http://schemas.microsoft.com/office/drawing/2014/main" id="{296F004F-87D5-46DE-933F-9E93CEC5CFBE}"/>
               </a:ext>
             </a:extLst>
           </p:cNvPr>
@@ -7117,7 +7117,7 @@
           <p:cNvPr id="7" name="">
             <a:extLst xmlns:a="http://schemas.openxmlformats.org/drawingml/2006/main">
               <a:ext uri="{FF2B5EF4-FFF2-40B4-BE49-F238E27FC236}">
-                <a16:creationId xmlns:a16="http://schemas.microsoft.com/office/drawing/2014/main" id="{85F32E16-704D-4F8F-B37A-57B494D52565}"/>
+                <a16:creationId xmlns:a16="http://schemas.microsoft.com/office/drawing/2014/main" id="{9C09FDD6-FFE6-4AD4-8F53-6D78BA6DB7B5}"/>
               </a:ext>
             </a:extLst>
           </p:cNvPr>
@@ -7146,7 +7146,7 @@
           <p:cNvPr id="8" name="">
             <a:extLst xmlns:a="http://schemas.openxmlformats.org/drawingml/2006/main">
               <a:ext uri="{FF2B5EF4-FFF2-40B4-BE49-F238E27FC236}">
-                <a16:creationId xmlns:a16="http://schemas.microsoft.com/office/drawing/2014/main" id="{C33E369B-38D4-4528-8FF3-706063D111AC}"/>
+                <a16:creationId xmlns:a16="http://schemas.microsoft.com/office/drawing/2014/main" id="{9C9611EB-A22B-4449-AF2D-9DCC8EA5F717}"/>
               </a:ext>
             </a:extLst>
           </p:cNvPr>
@@ -7191,7 +7191,7 @@
           <p:cNvPr id="9" name="">
             <a:extLst xmlns:a="http://schemas.openxmlformats.org/drawingml/2006/main">
               <a:ext uri="{FF2B5EF4-FFF2-40B4-BE49-F238E27FC236}">
-                <a16:creationId xmlns:a16="http://schemas.microsoft.com/office/drawing/2014/main" id="{F33AA63D-69C7-4346-9847-046C8A164836}"/>
+                <a16:creationId xmlns:a16="http://schemas.microsoft.com/office/drawing/2014/main" id="{3195506B-3DF0-4FFA-9B29-4837C07E046E}"/>
               </a:ext>
             </a:extLst>
           </p:cNvPr>
@@ -7236,7 +7236,7 @@
           <p:cNvPr id="10" name="">
             <a:extLst xmlns:a="http://schemas.openxmlformats.org/drawingml/2006/main">
               <a:ext uri="{FF2B5EF4-FFF2-40B4-BE49-F238E27FC236}">
-                <a16:creationId xmlns:a16="http://schemas.microsoft.com/office/drawing/2014/main" id="{3DAC89C3-58B7-4397-BEE6-9CAFA7FCC981}"/>
+                <a16:creationId xmlns:a16="http://schemas.microsoft.com/office/drawing/2014/main" id="{44F03B66-FF6D-481A-AB5B-664A794BC774}"/>
               </a:ext>
             </a:extLst>
           </p:cNvPr>
@@ -7265,7 +7265,7 @@
           <p:cNvPr id="11" name="">
             <a:extLst xmlns:a="http://schemas.openxmlformats.org/drawingml/2006/main">
               <a:ext uri="{FF2B5EF4-FFF2-40B4-BE49-F238E27FC236}">
-                <a16:creationId xmlns:a16="http://schemas.microsoft.com/office/drawing/2014/main" id="{E4BD8FA8-EC3C-4052-B413-F2231F134ACF}"/>
+                <a16:creationId xmlns:a16="http://schemas.microsoft.com/office/drawing/2014/main" id="{9EC7E290-181F-42B3-98E1-CDE58CB57073}"/>
               </a:ext>
             </a:extLst>
           </p:cNvPr>
@@ -7310,7 +7310,7 @@
           <p:cNvPr id="12" name="">
             <a:extLst xmlns:a="http://schemas.openxmlformats.org/drawingml/2006/main">
               <a:ext uri="{FF2B5EF4-FFF2-40B4-BE49-F238E27FC236}">
-                <a16:creationId xmlns:a16="http://schemas.microsoft.com/office/drawing/2014/main" id="{9EE45157-767B-4088-816A-7916F11BA60E}"/>
+                <a16:creationId xmlns:a16="http://schemas.microsoft.com/office/drawing/2014/main" id="{86EA8310-752B-40E5-A006-1D47D0E55088}"/>
               </a:ext>
             </a:extLst>
           </p:cNvPr>
@@ -7355,7 +7355,7 @@
           <p:cNvPr id="13" name="">
             <a:extLst xmlns:a="http://schemas.openxmlformats.org/drawingml/2006/main">
               <a:ext uri="{FF2B5EF4-FFF2-40B4-BE49-F238E27FC236}">
-                <a16:creationId xmlns:a16="http://schemas.microsoft.com/office/drawing/2014/main" id="{5322E9FE-4DFC-4C45-9865-77CBCD01A7F4}"/>
+                <a16:creationId xmlns:a16="http://schemas.microsoft.com/office/drawing/2014/main" id="{C6E53F97-3B45-4AB0-924D-7C1F41EC2373}"/>
               </a:ext>
             </a:extLst>
           </p:cNvPr>
@@ -7400,7 +7400,7 @@
           <p:cNvPr id="14" name="footer">
             <a:extLst xmlns:a="http://schemas.openxmlformats.org/drawingml/2006/main">
               <a:ext uri="{FF2B5EF4-FFF2-40B4-BE49-F238E27FC236}">
-                <a16:creationId xmlns:a16="http://schemas.microsoft.com/office/drawing/2014/main" id="{3034A121-BAD0-4ECA-9731-608F2CD37330}"/>
+                <a16:creationId xmlns:a16="http://schemas.microsoft.com/office/drawing/2014/main" id="{7B544286-293F-4719-991E-CBF97A523FB0}"/>
               </a:ext>
             </a:extLst>
           </p:cNvPr>
@@ -7443,7 +7443,7 @@
     </p:spTree>
     <p:extLst>
       <p:ext uri="{BB962C8B-B14F-4D97-AF65-F5344CB8AC3E}">
-        <p14:creationId xmlns:p14="http://schemas.microsoft.com/office/powerpoint/2010/main" val="1389746897"/>
+        <p14:creationId xmlns:p14="http://schemas.microsoft.com/office/powerpoint/2010/main" val="1476541097"/>
       </p:ext>
     </p:extLst>
   </p:cSld>
@@ -7467,7 +7467,7 @@
           <p:cNvPr id="1" name="slide-title">
             <a:extLst xmlns:a="http://schemas.openxmlformats.org/drawingml/2006/main">
               <a:ext uri="{FF2B5EF4-FFF2-40B4-BE49-F238E27FC236}">
-                <a16:creationId xmlns:a16="http://schemas.microsoft.com/office/drawing/2014/main" id="{A8D56FB6-7D9F-4DB2-885D-B81B0077981A}"/>
+                <a16:creationId xmlns:a16="http://schemas.microsoft.com/office/drawing/2014/main" id="{21CEE0BC-E66E-4C29-9B0D-4D6B40FD8A30}"/>
               </a:ext>
             </a:extLst>
           </p:cNvPr>
@@ -7512,7 +7512,7 @@
           <p:cNvPr id="2" name="">
             <a:extLst xmlns:a="http://schemas.openxmlformats.org/drawingml/2006/main">
               <a:ext uri="{FF2B5EF4-FFF2-40B4-BE49-F238E27FC236}">
-                <a16:creationId xmlns:a16="http://schemas.microsoft.com/office/drawing/2014/main" id="{1BC87A70-7754-4E00-A87B-B37DEE2289C2}"/>
+                <a16:creationId xmlns:a16="http://schemas.microsoft.com/office/drawing/2014/main" id="{C728D602-4B1A-42B3-A12E-9F1E57B434C2}"/>
               </a:ext>
             </a:extLst>
           </p:cNvPr>
@@ -7545,7 +7545,7 @@
           <p:cNvPr id="3" name="">
             <a:extLst xmlns:a="http://schemas.openxmlformats.org/drawingml/2006/main">
               <a:ext uri="{FF2B5EF4-FFF2-40B4-BE49-F238E27FC236}">
-                <a16:creationId xmlns:a16="http://schemas.microsoft.com/office/drawing/2014/main" id="{247FAB0D-A744-4311-82D3-9453FEB5C0FF}"/>
+                <a16:creationId xmlns:a16="http://schemas.microsoft.com/office/drawing/2014/main" id="{917E30BB-495C-48C3-BB38-6EAD14599AE3}"/>
               </a:ext>
             </a:extLst>
           </p:cNvPr>
@@ -7574,7 +7574,7 @@
           <p:cNvPr id="4" name="">
             <a:extLst xmlns:a="http://schemas.openxmlformats.org/drawingml/2006/main">
               <a:ext uri="{FF2B5EF4-FFF2-40B4-BE49-F238E27FC236}">
-                <a16:creationId xmlns:a16="http://schemas.microsoft.com/office/drawing/2014/main" id="{4DE26EBB-6769-4E3A-9E4A-DDC7B6FEC81F}"/>
+                <a16:creationId xmlns:a16="http://schemas.microsoft.com/office/drawing/2014/main" id="{71355869-F4F9-4E1F-9FFB-420B73FDC72E}"/>
               </a:ext>
             </a:extLst>
           </p:cNvPr>
@@ -7619,7 +7619,7 @@
           <p:cNvPr id="5" name="">
             <a:extLst xmlns:a="http://schemas.openxmlformats.org/drawingml/2006/main">
               <a:ext uri="{FF2B5EF4-FFF2-40B4-BE49-F238E27FC236}">
-                <a16:creationId xmlns:a16="http://schemas.microsoft.com/office/drawing/2014/main" id="{8578E0DE-736E-4561-947A-BE111B583073}"/>
+                <a16:creationId xmlns:a16="http://schemas.microsoft.com/office/drawing/2014/main" id="{8CB8A4E0-B906-4379-8A2D-58B5233AF2EF}"/>
               </a:ext>
             </a:extLst>
           </p:cNvPr>
@@ -7664,7 +7664,7 @@
           <p:cNvPr id="6" name="">
             <a:extLst xmlns:a="http://schemas.openxmlformats.org/drawingml/2006/main">
               <a:ext uri="{FF2B5EF4-FFF2-40B4-BE49-F238E27FC236}">
-                <a16:creationId xmlns:a16="http://schemas.microsoft.com/office/drawing/2014/main" id="{69166474-7D89-4663-A7CB-84D8BD902ED4}"/>
+                <a16:creationId xmlns:a16="http://schemas.microsoft.com/office/drawing/2014/main" id="{5F3AD168-BB59-4B32-B973-D17A68F10E54}"/>
               </a:ext>
             </a:extLst>
           </p:cNvPr>
@@ -7709,7 +7709,7 @@
           <p:cNvPr id="7" name="">
             <a:extLst xmlns:a="http://schemas.openxmlformats.org/drawingml/2006/main">
               <a:ext uri="{FF2B5EF4-FFF2-40B4-BE49-F238E27FC236}">
-                <a16:creationId xmlns:a16="http://schemas.microsoft.com/office/drawing/2014/main" id="{3D7B8C0C-9C7C-40D4-BF95-E01982F6960A}"/>
+                <a16:creationId xmlns:a16="http://schemas.microsoft.com/office/drawing/2014/main" id="{B0EC88C7-0BA5-4D15-961F-3E5585624126}"/>
               </a:ext>
             </a:extLst>
           </p:cNvPr>
@@ -7754,7 +7754,7 @@
           <p:cNvPr id="8" name="">
             <a:extLst xmlns:a="http://schemas.openxmlformats.org/drawingml/2006/main">
               <a:ext uri="{FF2B5EF4-FFF2-40B4-BE49-F238E27FC236}">
-                <a16:creationId xmlns:a16="http://schemas.microsoft.com/office/drawing/2014/main" id="{AFA3FB19-9C80-40AC-880A-67CBC6A1D026}"/>
+                <a16:creationId xmlns:a16="http://schemas.microsoft.com/office/drawing/2014/main" id="{2A6240AC-7336-4616-90EA-5879315D9867}"/>
               </a:ext>
             </a:extLst>
           </p:cNvPr>
@@ -7799,7 +7799,7 @@
           <p:cNvPr id="9" name="">
             <a:extLst xmlns:a="http://schemas.openxmlformats.org/drawingml/2006/main">
               <a:ext uri="{FF2B5EF4-FFF2-40B4-BE49-F238E27FC236}">
-                <a16:creationId xmlns:a16="http://schemas.microsoft.com/office/drawing/2014/main" id="{FD07EBC4-EA5D-40EB-9663-25EDB8641B91}"/>
+                <a16:creationId xmlns:a16="http://schemas.microsoft.com/office/drawing/2014/main" id="{6CAAD23E-07B4-42C4-8470-C2F59A5FA10D}"/>
               </a:ext>
             </a:extLst>
           </p:cNvPr>
@@ -7844,7 +7844,7 @@
           <p:cNvPr id="10" name="">
             <a:extLst xmlns:a="http://schemas.openxmlformats.org/drawingml/2006/main">
               <a:ext uri="{FF2B5EF4-FFF2-40B4-BE49-F238E27FC236}">
-                <a16:creationId xmlns:a16="http://schemas.microsoft.com/office/drawing/2014/main" id="{F3747B74-4D66-40BA-9A4B-1C52A92C5AB1}"/>
+                <a16:creationId xmlns:a16="http://schemas.microsoft.com/office/drawing/2014/main" id="{576C11E4-8241-4D92-BEF0-672023ABE89F}"/>
               </a:ext>
             </a:extLst>
           </p:cNvPr>
@@ -7889,7 +7889,7 @@
           <p:cNvPr id="11" name="">
             <a:extLst xmlns:a="http://schemas.openxmlformats.org/drawingml/2006/main">
               <a:ext uri="{FF2B5EF4-FFF2-40B4-BE49-F238E27FC236}">
-                <a16:creationId xmlns:a16="http://schemas.microsoft.com/office/drawing/2014/main" id="{B52A25FA-E95E-486E-97E1-71EB4F7DFD19}"/>
+                <a16:creationId xmlns:a16="http://schemas.microsoft.com/office/drawing/2014/main" id="{C62DD438-D1D0-46AE-B707-DB7E4B320696}"/>
               </a:ext>
             </a:extLst>
           </p:cNvPr>
@@ -7918,7 +7918,7 @@
           <p:cNvPr id="12" name="">
             <a:extLst xmlns:a="http://schemas.openxmlformats.org/drawingml/2006/main">
               <a:ext uri="{FF2B5EF4-FFF2-40B4-BE49-F238E27FC236}">
-                <a16:creationId xmlns:a16="http://schemas.microsoft.com/office/drawing/2014/main" id="{015A36C5-41A4-4EB3-B6DC-B13B223E5DE8}"/>
+                <a16:creationId xmlns:a16="http://schemas.microsoft.com/office/drawing/2014/main" id="{CF83E540-7E21-4F96-8DD8-D4F35EFCC226}"/>
               </a:ext>
             </a:extLst>
           </p:cNvPr>
@@ -7963,7 +7963,7 @@
           <p:cNvPr id="13" name="">
             <a:extLst xmlns:a="http://schemas.openxmlformats.org/drawingml/2006/main">
               <a:ext uri="{FF2B5EF4-FFF2-40B4-BE49-F238E27FC236}">
-                <a16:creationId xmlns:a16="http://schemas.microsoft.com/office/drawing/2014/main" id="{D27F7D6E-A662-4346-ADD1-BE4E43F07837}"/>
+                <a16:creationId xmlns:a16="http://schemas.microsoft.com/office/drawing/2014/main" id="{D3A79AB0-79C0-4642-8C6C-5BCDBE82956F}"/>
               </a:ext>
             </a:extLst>
           </p:cNvPr>
@@ -8008,7 +8008,7 @@
           <p:cNvPr id="14" name="">
             <a:extLst xmlns:a="http://schemas.openxmlformats.org/drawingml/2006/main">
               <a:ext uri="{FF2B5EF4-FFF2-40B4-BE49-F238E27FC236}">
-                <a16:creationId xmlns:a16="http://schemas.microsoft.com/office/drawing/2014/main" id="{FDB3CEC5-A29A-44D8-B635-3D00E2627B01}"/>
+                <a16:creationId xmlns:a16="http://schemas.microsoft.com/office/drawing/2014/main" id="{7209FCEA-7F14-4D93-9C1A-12C856B8664B}"/>
               </a:ext>
             </a:extLst>
           </p:cNvPr>
@@ -8053,7 +8053,7 @@
           <p:cNvPr id="15" name="">
             <a:extLst xmlns:a="http://schemas.openxmlformats.org/drawingml/2006/main">
               <a:ext uri="{FF2B5EF4-FFF2-40B4-BE49-F238E27FC236}">
-                <a16:creationId xmlns:a16="http://schemas.microsoft.com/office/drawing/2014/main" id="{BFF56101-4465-46B7-86DA-8BAE1DE9C3D6}"/>
+                <a16:creationId xmlns:a16="http://schemas.microsoft.com/office/drawing/2014/main" id="{E9469973-9FAF-4755-A9B3-4FF8E8216C52}"/>
               </a:ext>
             </a:extLst>
           </p:cNvPr>
@@ -8098,7 +8098,7 @@
           <p:cNvPr id="16" name="">
             <a:extLst xmlns:a="http://schemas.openxmlformats.org/drawingml/2006/main">
               <a:ext uri="{FF2B5EF4-FFF2-40B4-BE49-F238E27FC236}">
-                <a16:creationId xmlns:a16="http://schemas.microsoft.com/office/drawing/2014/main" id="{DDE37D2B-4625-4709-87C2-F4F6A671387E}"/>
+                <a16:creationId xmlns:a16="http://schemas.microsoft.com/office/drawing/2014/main" id="{122D1E3B-8609-444F-AA0B-A9F43873E129}"/>
               </a:ext>
             </a:extLst>
           </p:cNvPr>
@@ -8143,7 +8143,7 @@
           <p:cNvPr id="17" name="">
             <a:extLst xmlns:a="http://schemas.openxmlformats.org/drawingml/2006/main">
               <a:ext uri="{FF2B5EF4-FFF2-40B4-BE49-F238E27FC236}">
-                <a16:creationId xmlns:a16="http://schemas.microsoft.com/office/drawing/2014/main" id="{9BF366A9-C3B2-4536-BD75-AA42700FF5D4}"/>
+                <a16:creationId xmlns:a16="http://schemas.microsoft.com/office/drawing/2014/main" id="{43F9DE10-6879-48F2-BF13-5CE6A7E021D7}"/>
               </a:ext>
             </a:extLst>
           </p:cNvPr>
@@ -8188,7 +8188,7 @@
           <p:cNvPr id="18" name="">
             <a:extLst xmlns:a="http://schemas.openxmlformats.org/drawingml/2006/main">
               <a:ext uri="{FF2B5EF4-FFF2-40B4-BE49-F238E27FC236}">
-                <a16:creationId xmlns:a16="http://schemas.microsoft.com/office/drawing/2014/main" id="{8F8A191B-C02B-423F-ABE3-49DB42DEDD44}"/>
+                <a16:creationId xmlns:a16="http://schemas.microsoft.com/office/drawing/2014/main" id="{89F4840C-B7B3-4B2A-A148-C5193712DF29}"/>
               </a:ext>
             </a:extLst>
           </p:cNvPr>
@@ -8233,7 +8233,7 @@
           <p:cNvPr id="19" name="">
             <a:extLst xmlns:a="http://schemas.openxmlformats.org/drawingml/2006/main">
               <a:ext uri="{FF2B5EF4-FFF2-40B4-BE49-F238E27FC236}">
-                <a16:creationId xmlns:a16="http://schemas.microsoft.com/office/drawing/2014/main" id="{3A9866D9-CDD9-41F0-9673-9015FEB5EEB8}"/>
+                <a16:creationId xmlns:a16="http://schemas.microsoft.com/office/drawing/2014/main" id="{FB176BC4-A8A2-49CA-9014-689E0BC21492}"/>
               </a:ext>
             </a:extLst>
           </p:cNvPr>
@@ -8262,7 +8262,7 @@
           <p:cNvPr id="20" name="">
             <a:extLst xmlns:a="http://schemas.openxmlformats.org/drawingml/2006/main">
               <a:ext uri="{FF2B5EF4-FFF2-40B4-BE49-F238E27FC236}">
-                <a16:creationId xmlns:a16="http://schemas.microsoft.com/office/drawing/2014/main" id="{830A09BE-1AB2-4CF4-B13A-77F869948B2B}"/>
+                <a16:creationId xmlns:a16="http://schemas.microsoft.com/office/drawing/2014/main" id="{1CB41200-4EDE-496F-B3BA-03237F0D66EA}"/>
               </a:ext>
             </a:extLst>
           </p:cNvPr>
@@ -8307,7 +8307,7 @@
           <p:cNvPr id="21" name="footer">
             <a:extLst xmlns:a="http://schemas.openxmlformats.org/drawingml/2006/main">
               <a:ext uri="{FF2B5EF4-FFF2-40B4-BE49-F238E27FC236}">
-                <a16:creationId xmlns:a16="http://schemas.microsoft.com/office/drawing/2014/main" id="{439A3B39-6E68-4775-A3E7-DFBD3F1E356A}"/>
+                <a16:creationId xmlns:a16="http://schemas.microsoft.com/office/drawing/2014/main" id="{B4C30A8C-84F4-44A8-BFEF-8F35F55263F0}"/>
               </a:ext>
             </a:extLst>
           </p:cNvPr>
@@ -8350,7 +8350,7 @@
     </p:spTree>
     <p:extLst>
       <p:ext uri="{BB962C8B-B14F-4D97-AF65-F5344CB8AC3E}">
-        <p14:creationId xmlns:p14="http://schemas.microsoft.com/office/powerpoint/2010/main" val="1218095054"/>
+        <p14:creationId xmlns:p14="http://schemas.microsoft.com/office/powerpoint/2010/main" val="1206750821"/>
       </p:ext>
     </p:extLst>
   </p:cSld>
